--- a/2048_presentation.pptx
+++ b/2048_presentation.pptx
@@ -287,6 +287,60 @@
           <a:bodyPr/>
           <a:lstStyle/>
           <a:p>
+            <a:pPr marL="0" marR="0" lvl="0" indent="0" algn="l" defTabSz="914400" rtl="0" eaLnBrk="1" fontAlgn="auto" latinLnBrk="0" hangingPunct="1">
+              <a:lnSpc>
+                <a:spcPct val="100000"/>
+              </a:lnSpc>
+              <a:spcBef>
+                <a:spcPts val="0"/>
+              </a:spcBef>
+              <a:spcAft>
+                <a:spcPts val="0"/>
+              </a:spcAft>
+              <a:buClrTx/>
+              <a:buSzTx/>
+              <a:buFontTx/>
+              <a:buNone/>
+              <a:tabLst/>
+              <a:defRPr/>
+            </a:pPr>
+            <a:r>
+              <a:rPr lang="fr-FR" sz="1200" kern="1200" dirty="0">
+                <a:solidFill>
+                  <a:schemeClr val="tx1"/>
+                </a:solidFill>
+                <a:effectLst/>
+                <a:latin typeface="+mn-lt"/>
+                <a:ea typeface="+mn-ea"/>
+                <a:cs typeface="+mn-cs"/>
+              </a:rPr>
+              <a:t>Bonjour, je vais vous présenter mon projet fil rouge : </a:t>
+            </a:r>
+            <a:br>
+              <a:rPr lang="fr-FR" sz="1200" kern="1200" dirty="0">
+                <a:solidFill>
+                  <a:schemeClr val="tx1"/>
+                </a:solidFill>
+                <a:effectLst/>
+                <a:latin typeface="+mn-lt"/>
+                <a:ea typeface="+mn-ea"/>
+                <a:cs typeface="+mn-cs"/>
+              </a:rPr>
+            </a:br>
+            <a:r>
+              <a:rPr lang="fr-FR" sz="1200" kern="1200" dirty="0">
+                <a:solidFill>
+                  <a:schemeClr val="tx1"/>
+                </a:solidFill>
+                <a:effectLst/>
+                <a:latin typeface="+mn-lt"/>
+                <a:ea typeface="+mn-ea"/>
+                <a:cs typeface="+mn-cs"/>
+              </a:rPr>
+              <a:t>une implémentation du jeu 2048 en langage C, développée dans le cadre du module langages compilés.</a:t>
+            </a:r>
+          </a:p>
+          <a:p>
             <a:endParaRPr lang="en-US" dirty="0"/>
           </a:p>
         </p:txBody>
@@ -371,6 +425,89 @@
           <a:bodyPr/>
           <a:lstStyle/>
           <a:p>
+            <a:r>
+              <a:rPr lang="fr-FR" sz="1200" kern="1200" dirty="0">
+                <a:solidFill>
+                  <a:schemeClr val="tx1"/>
+                </a:solidFill>
+                <a:effectLst/>
+                <a:latin typeface="+mn-lt"/>
+                <a:ea typeface="+mn-ea"/>
+                <a:cs typeface="+mn-cs"/>
+              </a:rPr>
+              <a:t>L'objectif principal était de mettre en pratique la gestion mémoire en C avec </a:t>
+            </a:r>
+            <a:r>
+              <a:rPr lang="fr-FR" sz="1200" kern="1200" dirty="0" err="1">
+                <a:solidFill>
+                  <a:schemeClr val="tx1"/>
+                </a:solidFill>
+                <a:effectLst/>
+                <a:latin typeface="+mn-lt"/>
+                <a:ea typeface="+mn-ea"/>
+                <a:cs typeface="+mn-cs"/>
+              </a:rPr>
+              <a:t>malloc</a:t>
+            </a:r>
+            <a:r>
+              <a:rPr lang="fr-FR" sz="1200" kern="1200" dirty="0">
+                <a:solidFill>
+                  <a:schemeClr val="tx1"/>
+                </a:solidFill>
+                <a:effectLst/>
+                <a:latin typeface="+mn-lt"/>
+                <a:ea typeface="+mn-ea"/>
+                <a:cs typeface="+mn-cs"/>
+              </a:rPr>
+              <a:t>, </a:t>
+            </a:r>
+            <a:r>
+              <a:rPr lang="fr-FR" sz="1200" kern="1200" dirty="0" err="1">
+                <a:solidFill>
+                  <a:schemeClr val="tx1"/>
+                </a:solidFill>
+                <a:effectLst/>
+                <a:latin typeface="+mn-lt"/>
+                <a:ea typeface="+mn-ea"/>
+                <a:cs typeface="+mn-cs"/>
+              </a:rPr>
+              <a:t>calloc</a:t>
+            </a:r>
+            <a:r>
+              <a:rPr lang="fr-FR" sz="1200" kern="1200" dirty="0">
+                <a:solidFill>
+                  <a:schemeClr val="tx1"/>
+                </a:solidFill>
+                <a:effectLst/>
+                <a:latin typeface="+mn-lt"/>
+                <a:ea typeface="+mn-ea"/>
+                <a:cs typeface="+mn-cs"/>
+              </a:rPr>
+              <a:t> et free, </a:t>
+            </a:r>
+            <a:br>
+              <a:rPr lang="fr-FR" sz="1200" kern="1200" dirty="0">
+                <a:solidFill>
+                  <a:schemeClr val="tx1"/>
+                </a:solidFill>
+                <a:effectLst/>
+                <a:latin typeface="+mn-lt"/>
+                <a:ea typeface="+mn-ea"/>
+                <a:cs typeface="+mn-cs"/>
+              </a:rPr>
+            </a:br>
+            <a:r>
+              <a:rPr lang="fr-FR" sz="1200" kern="1200" dirty="0">
+                <a:solidFill>
+                  <a:schemeClr val="tx1"/>
+                </a:solidFill>
+                <a:effectLst/>
+                <a:latin typeface="+mn-lt"/>
+                <a:ea typeface="+mn-ea"/>
+                <a:cs typeface="+mn-cs"/>
+              </a:rPr>
+              <a:t>tout en implémentant la logique complète du jeu et en structurant le code proprement sur plusieurs fichiers.</a:t>
+            </a:r>
             <a:endParaRPr lang="en-US" dirty="0"/>
           </a:p>
         </p:txBody>
@@ -455,6 +592,87 @@
           <a:bodyPr/>
           <a:lstStyle/>
           <a:p>
+            <a:r>
+              <a:rPr lang="fr-FR" sz="1200" kern="1200" dirty="0">
+                <a:solidFill>
+                  <a:schemeClr val="tx1"/>
+                </a:solidFill>
+                <a:effectLst/>
+                <a:latin typeface="+mn-lt"/>
+                <a:ea typeface="+mn-ea"/>
+                <a:cs typeface="+mn-cs"/>
+              </a:rPr>
+              <a:t>Le jeu se joue avec les touches Z Q S D. </a:t>
+            </a:r>
+            <a:br>
+              <a:rPr lang="fr-FR" sz="1200" kern="1200" dirty="0">
+                <a:solidFill>
+                  <a:schemeClr val="tx1"/>
+                </a:solidFill>
+                <a:effectLst/>
+                <a:latin typeface="+mn-lt"/>
+                <a:ea typeface="+mn-ea"/>
+                <a:cs typeface="+mn-cs"/>
+              </a:rPr>
+            </a:br>
+            <a:r>
+              <a:rPr lang="fr-FR" sz="1200" kern="1200" dirty="0">
+                <a:solidFill>
+                  <a:schemeClr val="tx1"/>
+                </a:solidFill>
+                <a:effectLst/>
+                <a:latin typeface="+mn-lt"/>
+                <a:ea typeface="+mn-ea"/>
+                <a:cs typeface="+mn-cs"/>
+              </a:rPr>
+              <a:t>À chaque coup, les tuiles se déplacent, les identiques fusionnent et doublent leur valeur. </a:t>
+            </a:r>
+            <a:br>
+              <a:rPr lang="fr-FR" sz="1200" kern="1200" dirty="0">
+                <a:solidFill>
+                  <a:schemeClr val="tx1"/>
+                </a:solidFill>
+                <a:effectLst/>
+                <a:latin typeface="+mn-lt"/>
+                <a:ea typeface="+mn-ea"/>
+                <a:cs typeface="+mn-cs"/>
+              </a:rPr>
+            </a:br>
+            <a:r>
+              <a:rPr lang="fr-FR" sz="1200" kern="1200" dirty="0">
+                <a:solidFill>
+                  <a:schemeClr val="tx1"/>
+                </a:solidFill>
+                <a:effectLst/>
+                <a:latin typeface="+mn-lt"/>
+                <a:ea typeface="+mn-ea"/>
+                <a:cs typeface="+mn-cs"/>
+              </a:rPr>
+              <a:t>Un 2 apparaît ensuite dans une case vide. </a:t>
+            </a:r>
+            <a:br>
+              <a:rPr lang="fr-FR" sz="1200" kern="1200" dirty="0">
+                <a:solidFill>
+                  <a:schemeClr val="tx1"/>
+                </a:solidFill>
+                <a:effectLst/>
+                <a:latin typeface="+mn-lt"/>
+                <a:ea typeface="+mn-ea"/>
+                <a:cs typeface="+mn-cs"/>
+              </a:rPr>
+            </a:br>
+            <a:r>
+              <a:rPr lang="fr-FR" sz="1200" kern="1200" dirty="0">
+                <a:solidFill>
+                  <a:schemeClr val="tx1"/>
+                </a:solidFill>
+                <a:effectLst/>
+                <a:latin typeface="+mn-lt"/>
+                <a:ea typeface="+mn-ea"/>
+                <a:cs typeface="+mn-cs"/>
+              </a:rPr>
+              <a:t>On gagne en atteignant 2048, on perd quand plus aucun mouvement n'est possible.</a:t>
+            </a:r>
             <a:endParaRPr lang="en-US" dirty="0"/>
           </a:p>
         </p:txBody>
@@ -539,6 +757,64 @@
           <a:bodyPr/>
           <a:lstStyle/>
           <a:p>
+            <a:r>
+              <a:rPr lang="fr-FR" sz="1200" kern="1200" dirty="0">
+                <a:solidFill>
+                  <a:schemeClr val="tx1"/>
+                </a:solidFill>
+                <a:effectLst/>
+                <a:latin typeface="+mn-lt"/>
+                <a:ea typeface="+mn-ea"/>
+                <a:cs typeface="+mn-cs"/>
+              </a:rPr>
+              <a:t>En plus du jeu de base, j'ai ajouté la possibilité de choisir la taille de la grille, </a:t>
+            </a:r>
+            <a:br>
+              <a:rPr lang="fr-FR" sz="1200" kern="1200" dirty="0">
+                <a:solidFill>
+                  <a:schemeClr val="tx1"/>
+                </a:solidFill>
+                <a:effectLst/>
+                <a:latin typeface="+mn-lt"/>
+                <a:ea typeface="+mn-ea"/>
+                <a:cs typeface="+mn-cs"/>
+              </a:rPr>
+            </a:br>
+            <a:r>
+              <a:rPr lang="fr-FR" sz="1200" kern="1200" dirty="0">
+                <a:solidFill>
+                  <a:schemeClr val="tx1"/>
+                </a:solidFill>
+                <a:effectLst/>
+                <a:latin typeface="+mn-lt"/>
+                <a:ea typeface="+mn-ea"/>
+                <a:cs typeface="+mn-cs"/>
+              </a:rPr>
+              <a:t>un système de sauvegarde et chargement, et un affichage coloré en console avec les codes ANSI</a:t>
+            </a:r>
+            <a:br>
+              <a:rPr lang="fr-FR" sz="1200" kern="1200" dirty="0">
+                <a:solidFill>
+                  <a:schemeClr val="tx1"/>
+                </a:solidFill>
+                <a:effectLst/>
+                <a:latin typeface="+mn-lt"/>
+                <a:ea typeface="+mn-ea"/>
+                <a:cs typeface="+mn-cs"/>
+              </a:rPr>
+            </a:br>
+            <a:r>
+              <a:rPr lang="fr-FR" sz="1200" kern="1200" dirty="0">
+                <a:solidFill>
+                  <a:schemeClr val="tx1"/>
+                </a:solidFill>
+                <a:effectLst/>
+                <a:latin typeface="+mn-lt"/>
+                <a:ea typeface="+mn-ea"/>
+                <a:cs typeface="+mn-cs"/>
+              </a:rPr>
+              <a:t>Et enfin un score qui s’affiche et se calcule automatiquement</a:t>
+            </a:r>
             <a:endParaRPr lang="en-US" dirty="0"/>
           </a:p>
         </p:txBody>
@@ -623,6 +899,64 @@
           <a:bodyPr/>
           <a:lstStyle/>
           <a:p>
+            <a:r>
+              <a:rPr lang="fr-FR" sz="1200" kern="1200" dirty="0">
+                <a:solidFill>
+                  <a:schemeClr val="tx1"/>
+                </a:solidFill>
+                <a:effectLst/>
+                <a:latin typeface="+mn-lt"/>
+                <a:ea typeface="+mn-ea"/>
+                <a:cs typeface="+mn-cs"/>
+              </a:rPr>
+              <a:t>La principale difficulté était l'algorithme de déplacement. </a:t>
+            </a:r>
+            <a:br>
+              <a:rPr lang="fr-FR" sz="1200" kern="1200" dirty="0">
+                <a:solidFill>
+                  <a:schemeClr val="tx1"/>
+                </a:solidFill>
+                <a:effectLst/>
+                <a:latin typeface="+mn-lt"/>
+                <a:ea typeface="+mn-ea"/>
+                <a:cs typeface="+mn-cs"/>
+              </a:rPr>
+            </a:br>
+            <a:r>
+              <a:rPr lang="fr-FR" sz="1200" kern="1200" dirty="0">
+                <a:solidFill>
+                  <a:schemeClr val="tx1"/>
+                </a:solidFill>
+                <a:effectLst/>
+                <a:latin typeface="+mn-lt"/>
+                <a:ea typeface="+mn-ea"/>
+                <a:cs typeface="+mn-cs"/>
+              </a:rPr>
+              <a:t>Au départ les tuiles sautaient par-dessus d'autres. J'ai résolu ça en découpant chaque mouvement en 3 étapes : tasser, fusionner, puis retasser. </a:t>
+            </a:r>
+            <a:br>
+              <a:rPr lang="fr-FR" sz="1200" kern="1200" dirty="0">
+                <a:solidFill>
+                  <a:schemeClr val="tx1"/>
+                </a:solidFill>
+                <a:effectLst/>
+                <a:latin typeface="+mn-lt"/>
+                <a:ea typeface="+mn-ea"/>
+                <a:cs typeface="+mn-cs"/>
+              </a:rPr>
+            </a:br>
+            <a:r>
+              <a:rPr lang="fr-FR" sz="1200" kern="1200" dirty="0">
+                <a:solidFill>
+                  <a:schemeClr val="tx1"/>
+                </a:solidFill>
+                <a:effectLst/>
+                <a:latin typeface="+mn-lt"/>
+                <a:ea typeface="+mn-ea"/>
+                <a:cs typeface="+mn-cs"/>
+              </a:rPr>
+              <a:t>La sauvegarde multi-taille a aussi été délicate car il fallait recréer la grille à la bonne taille avant de charger les données</a:t>
+            </a:r>
             <a:endParaRPr lang="en-US" dirty="0"/>
           </a:p>
         </p:txBody>
@@ -725,6 +1059,88 @@
           <a:bodyPr/>
           <a:lstStyle/>
           <a:p>
+            <a:r>
+              <a:rPr lang="fr-FR" sz="1200" kern="1200" dirty="0">
+                <a:solidFill>
+                  <a:schemeClr val="tx1"/>
+                </a:solidFill>
+                <a:effectLst/>
+                <a:latin typeface="+mn-lt"/>
+                <a:ea typeface="+mn-ea"/>
+                <a:cs typeface="+mn-cs"/>
+              </a:rPr>
+              <a:t>Ma partie de code préférée c'est </a:t>
+            </a:r>
+            <a:r>
+              <a:rPr lang="fr-FR" sz="1200" kern="1200" dirty="0" err="1">
+                <a:solidFill>
+                  <a:schemeClr val="tx1"/>
+                </a:solidFill>
+                <a:effectLst/>
+                <a:latin typeface="+mn-lt"/>
+                <a:ea typeface="+mn-ea"/>
+                <a:cs typeface="+mn-cs"/>
+              </a:rPr>
+              <a:t>ajouter_tuile</a:t>
+            </a:r>
+            <a:r>
+              <a:rPr lang="fr-FR" sz="1200" kern="1200" dirty="0">
+                <a:solidFill>
+                  <a:schemeClr val="tx1"/>
+                </a:solidFill>
+                <a:effectLst/>
+                <a:latin typeface="+mn-lt"/>
+                <a:ea typeface="+mn-ea"/>
+                <a:cs typeface="+mn-cs"/>
+              </a:rPr>
+              <a:t>. </a:t>
+            </a:r>
+            <a:br>
+              <a:rPr lang="fr-FR" sz="1200" kern="1200" dirty="0">
+                <a:solidFill>
+                  <a:schemeClr val="tx1"/>
+                </a:solidFill>
+                <a:effectLst/>
+                <a:latin typeface="+mn-lt"/>
+                <a:ea typeface="+mn-ea"/>
+                <a:cs typeface="+mn-cs"/>
+              </a:rPr>
+            </a:br>
+            <a:r>
+              <a:rPr lang="fr-FR" sz="1200" kern="1200" dirty="0">
+                <a:solidFill>
+                  <a:schemeClr val="tx1"/>
+                </a:solidFill>
+                <a:effectLst/>
+                <a:latin typeface="+mn-lt"/>
+                <a:ea typeface="+mn-ea"/>
+                <a:cs typeface="+mn-cs"/>
+              </a:rPr>
+              <a:t>Ce que j'aime c'est l'approche algorithmique : plutôt que de chercher une case vide au hasard en boucle, je recense d'abord toutes les cases vides, puis je tire une seule fois au sort parmi elles. </a:t>
+            </a:r>
+            <a:br>
+              <a:rPr lang="fr-FR" sz="1200" kern="1200" dirty="0">
+                <a:solidFill>
+                  <a:schemeClr val="tx1"/>
+                </a:solidFill>
+                <a:effectLst/>
+                <a:latin typeface="+mn-lt"/>
+                <a:ea typeface="+mn-ea"/>
+                <a:cs typeface="+mn-cs"/>
+              </a:rPr>
+            </a:br>
+            <a:r>
+              <a:rPr lang="fr-FR" sz="1200" kern="1200" dirty="0">
+                <a:solidFill>
+                  <a:schemeClr val="tx1"/>
+                </a:solidFill>
+                <a:effectLst/>
+                <a:latin typeface="+mn-lt"/>
+                <a:ea typeface="+mn-ea"/>
+                <a:cs typeface="+mn-cs"/>
+              </a:rPr>
+              <a:t>C'est plus propre et ça évite de boucler longtemps si la grille est presque pleine</a:t>
+            </a:r>
             <a:endParaRPr lang="en-US" dirty="0"/>
           </a:p>
         </p:txBody>
@@ -815,6 +1231,109 @@
           <a:bodyPr/>
           <a:lstStyle/>
           <a:p>
+            <a:r>
+              <a:rPr lang="fr-FR" sz="1200" kern="1200" dirty="0">
+                <a:solidFill>
+                  <a:schemeClr val="tx1"/>
+                </a:solidFill>
+                <a:effectLst/>
+                <a:latin typeface="+mn-lt"/>
+                <a:ea typeface="+mn-ea"/>
+                <a:cs typeface="+mn-cs"/>
+              </a:rPr>
+              <a:t>Pour conclure, ce projet m'a permis de vraiment comprendre la gestion mémoire en C et de voir concrètement pourquoi il faut libérer ce qu'on alloue. </a:t>
+            </a:r>
+            <a:br>
+              <a:rPr lang="fr-FR" sz="1200" kern="1200" dirty="0">
+                <a:solidFill>
+                  <a:schemeClr val="tx1"/>
+                </a:solidFill>
+                <a:effectLst/>
+                <a:latin typeface="+mn-lt"/>
+                <a:ea typeface="+mn-ea"/>
+                <a:cs typeface="+mn-cs"/>
+              </a:rPr>
+            </a:br>
+            <a:r>
+              <a:rPr lang="fr-FR" sz="1200" kern="1200" dirty="0">
+                <a:solidFill>
+                  <a:schemeClr val="tx1"/>
+                </a:solidFill>
+                <a:effectLst/>
+                <a:latin typeface="+mn-lt"/>
+                <a:ea typeface="+mn-ea"/>
+                <a:cs typeface="+mn-cs"/>
+              </a:rPr>
+              <a:t>Si j'avais eu plus de temps, j'aurais aimé ajouter une interface graphique ou une IA. </a:t>
+            </a:r>
+            <a:br>
+              <a:rPr lang="fr-FR" sz="1200" kern="1200" dirty="0">
+                <a:solidFill>
+                  <a:schemeClr val="tx1"/>
+                </a:solidFill>
+                <a:effectLst/>
+                <a:latin typeface="+mn-lt"/>
+                <a:ea typeface="+mn-ea"/>
+                <a:cs typeface="+mn-cs"/>
+              </a:rPr>
+            </a:br>
+            <a:br>
+              <a:rPr lang="fr-FR" sz="1200" kern="1200" dirty="0">
+                <a:solidFill>
+                  <a:schemeClr val="tx1"/>
+                </a:solidFill>
+                <a:effectLst/>
+                <a:latin typeface="+mn-lt"/>
+                <a:ea typeface="+mn-ea"/>
+                <a:cs typeface="+mn-cs"/>
+              </a:rPr>
+            </a:br>
+            <a:r>
+              <a:rPr lang="fr-FR" sz="1200" kern="1200" dirty="0">
+                <a:solidFill>
+                  <a:schemeClr val="tx1"/>
+                </a:solidFill>
+                <a:effectLst/>
+                <a:latin typeface="+mn-lt"/>
+                <a:ea typeface="+mn-ea"/>
+                <a:cs typeface="+mn-cs"/>
+              </a:rPr>
+              <a:t>Merci pour votre attention !</a:t>
+            </a:r>
+            <a:br>
+              <a:rPr lang="fr-FR" sz="1200" kern="1200" dirty="0">
+                <a:solidFill>
+                  <a:schemeClr val="tx1"/>
+                </a:solidFill>
+                <a:effectLst/>
+                <a:latin typeface="+mn-lt"/>
+                <a:ea typeface="+mn-ea"/>
+                <a:cs typeface="+mn-cs"/>
+              </a:rPr>
+            </a:br>
+            <a:br>
+              <a:rPr lang="fr-FR" sz="1200" kern="1200" dirty="0">
+                <a:solidFill>
+                  <a:schemeClr val="tx1"/>
+                </a:solidFill>
+                <a:effectLst/>
+                <a:latin typeface="+mn-lt"/>
+                <a:ea typeface="+mn-ea"/>
+                <a:cs typeface="+mn-cs"/>
+              </a:rPr>
+            </a:br>
+            <a:r>
+              <a:rPr lang="fr-FR" sz="1200" kern="1200" dirty="0">
+                <a:solidFill>
+                  <a:schemeClr val="tx1"/>
+                </a:solidFill>
+                <a:effectLst/>
+                <a:latin typeface="+mn-lt"/>
+                <a:ea typeface="+mn-ea"/>
+                <a:cs typeface="+mn-cs"/>
+              </a:rPr>
+              <a:t>FIN DE LA PRESENTATION </a:t>
+            </a:r>
             <a:endParaRPr lang="en-US" dirty="0"/>
           </a:p>
         </p:txBody>
@@ -1366,7 +1885,7 @@
         </p:nvSpPr>
         <p:spPr>
           <a:xfrm>
-            <a:off x="6035040" y="777240"/>
+            <a:off x="5655458" y="1545336"/>
             <a:ext cx="2176272" cy="2176272"/>
           </a:xfrm>
           <a:prstGeom prst="rect">
@@ -1393,7 +1912,7 @@
         </p:nvSpPr>
         <p:spPr>
           <a:xfrm>
-            <a:off x="6089904" y="832104"/>
+            <a:off x="5710322" y="1600200"/>
             <a:ext cx="475488" cy="475488"/>
           </a:xfrm>
           <a:prstGeom prst="rect">
@@ -1420,7 +1939,7 @@
         </p:nvSpPr>
         <p:spPr>
           <a:xfrm>
-            <a:off x="6620256" y="832104"/>
+            <a:off x="6240674" y="1600200"/>
             <a:ext cx="475488" cy="475488"/>
           </a:xfrm>
           <a:prstGeom prst="rect">
@@ -1447,7 +1966,7 @@
         </p:nvSpPr>
         <p:spPr>
           <a:xfrm>
-            <a:off x="7150608" y="832104"/>
+            <a:off x="6771026" y="1600200"/>
             <a:ext cx="475488" cy="475488"/>
           </a:xfrm>
           <a:prstGeom prst="rect">
@@ -1474,7 +1993,7 @@
         </p:nvSpPr>
         <p:spPr>
           <a:xfrm>
-            <a:off x="7150608" y="832104"/>
+            <a:off x="6771026" y="1600200"/>
             <a:ext cx="475488" cy="475488"/>
           </a:xfrm>
           <a:prstGeom prst="rect">
@@ -1510,7 +2029,7 @@
         </p:nvSpPr>
         <p:spPr>
           <a:xfrm>
-            <a:off x="7680960" y="832104"/>
+            <a:off x="7301378" y="1600200"/>
             <a:ext cx="475488" cy="475488"/>
           </a:xfrm>
           <a:prstGeom prst="rect">
@@ -1537,7 +2056,7 @@
         </p:nvSpPr>
         <p:spPr>
           <a:xfrm>
-            <a:off x="7680960" y="832104"/>
+            <a:off x="7301378" y="1600200"/>
             <a:ext cx="475488" cy="475488"/>
           </a:xfrm>
           <a:prstGeom prst="rect">
@@ -1573,7 +2092,7 @@
         </p:nvSpPr>
         <p:spPr>
           <a:xfrm>
-            <a:off x="6089904" y="1362456"/>
+            <a:off x="5710322" y="2130552"/>
             <a:ext cx="475488" cy="475488"/>
           </a:xfrm>
           <a:prstGeom prst="rect">
@@ -1600,7 +2119,7 @@
         </p:nvSpPr>
         <p:spPr>
           <a:xfrm>
-            <a:off x="6620256" y="1362456"/>
+            <a:off x="6240674" y="2130552"/>
             <a:ext cx="475488" cy="475488"/>
           </a:xfrm>
           <a:prstGeom prst="rect">
@@ -1627,7 +2146,7 @@
         </p:nvSpPr>
         <p:spPr>
           <a:xfrm>
-            <a:off x="6620256" y="1362456"/>
+            <a:off x="6240674" y="2130552"/>
             <a:ext cx="475488" cy="475488"/>
           </a:xfrm>
           <a:prstGeom prst="rect">
@@ -1663,7 +2182,7 @@
         </p:nvSpPr>
         <p:spPr>
           <a:xfrm>
-            <a:off x="7150608" y="1362456"/>
+            <a:off x="6771026" y="2130552"/>
             <a:ext cx="475488" cy="475488"/>
           </a:xfrm>
           <a:prstGeom prst="rect">
@@ -1690,7 +2209,7 @@
         </p:nvSpPr>
         <p:spPr>
           <a:xfrm>
-            <a:off x="7150608" y="1362456"/>
+            <a:off x="6771026" y="2130552"/>
             <a:ext cx="475488" cy="475488"/>
           </a:xfrm>
           <a:prstGeom prst="rect">
@@ -1726,7 +2245,7 @@
         </p:nvSpPr>
         <p:spPr>
           <a:xfrm>
-            <a:off x="7680960" y="1362456"/>
+            <a:off x="7301378" y="2130552"/>
             <a:ext cx="475488" cy="475488"/>
           </a:xfrm>
           <a:prstGeom prst="rect">
@@ -1753,7 +2272,7 @@
         </p:nvSpPr>
         <p:spPr>
           <a:xfrm>
-            <a:off x="7680960" y="1362456"/>
+            <a:off x="7301378" y="2130552"/>
             <a:ext cx="475488" cy="475488"/>
           </a:xfrm>
           <a:prstGeom prst="rect">
@@ -1789,7 +2308,7 @@
         </p:nvSpPr>
         <p:spPr>
           <a:xfrm>
-            <a:off x="6089904" y="1892808"/>
+            <a:off x="5710322" y="2660904"/>
             <a:ext cx="475488" cy="475488"/>
           </a:xfrm>
           <a:prstGeom prst="rect">
@@ -1816,7 +2335,7 @@
         </p:nvSpPr>
         <p:spPr>
           <a:xfrm>
-            <a:off x="6089904" y="1892808"/>
+            <a:off x="5710322" y="2660904"/>
             <a:ext cx="475488" cy="475488"/>
           </a:xfrm>
           <a:prstGeom prst="rect">
@@ -1852,7 +2371,7 @@
         </p:nvSpPr>
         <p:spPr>
           <a:xfrm>
-            <a:off x="6620256" y="1892808"/>
+            <a:off x="6240674" y="2660904"/>
             <a:ext cx="475488" cy="475488"/>
           </a:xfrm>
           <a:prstGeom prst="rect">
@@ -1879,7 +2398,7 @@
         </p:nvSpPr>
         <p:spPr>
           <a:xfrm>
-            <a:off x="6620256" y="1892808"/>
+            <a:off x="6240674" y="2660904"/>
             <a:ext cx="475488" cy="475488"/>
           </a:xfrm>
           <a:prstGeom prst="rect">
@@ -1915,7 +2434,7 @@
         </p:nvSpPr>
         <p:spPr>
           <a:xfrm>
-            <a:off x="7150608" y="1892808"/>
+            <a:off x="6771026" y="2660904"/>
             <a:ext cx="475488" cy="475488"/>
           </a:xfrm>
           <a:prstGeom prst="rect">
@@ -1942,7 +2461,7 @@
         </p:nvSpPr>
         <p:spPr>
           <a:xfrm>
-            <a:off x="7150608" y="1892808"/>
+            <a:off x="6771026" y="2660904"/>
             <a:ext cx="475488" cy="475488"/>
           </a:xfrm>
           <a:prstGeom prst="rect">
@@ -1978,7 +2497,7 @@
         </p:nvSpPr>
         <p:spPr>
           <a:xfrm>
-            <a:off x="7680960" y="1892808"/>
+            <a:off x="7301378" y="2660904"/>
             <a:ext cx="475488" cy="475488"/>
           </a:xfrm>
           <a:prstGeom prst="rect">
@@ -2005,7 +2524,7 @@
         </p:nvSpPr>
         <p:spPr>
           <a:xfrm>
-            <a:off x="6089904" y="2423160"/>
+            <a:off x="5710322" y="3191256"/>
             <a:ext cx="475488" cy="475488"/>
           </a:xfrm>
           <a:prstGeom prst="rect">
@@ -2032,7 +2551,7 @@
         </p:nvSpPr>
         <p:spPr>
           <a:xfrm>
-            <a:off x="6620256" y="2423160"/>
+            <a:off x="6240674" y="3191256"/>
             <a:ext cx="475488" cy="475488"/>
           </a:xfrm>
           <a:prstGeom prst="rect">
@@ -2059,7 +2578,7 @@
         </p:nvSpPr>
         <p:spPr>
           <a:xfrm>
-            <a:off x="6620256" y="2423160"/>
+            <a:off x="6240674" y="3191256"/>
             <a:ext cx="475488" cy="475488"/>
           </a:xfrm>
           <a:prstGeom prst="rect">
@@ -2095,7 +2614,7 @@
         </p:nvSpPr>
         <p:spPr>
           <a:xfrm>
-            <a:off x="7150608" y="2423160"/>
+            <a:off x="6771026" y="3191256"/>
             <a:ext cx="475488" cy="475488"/>
           </a:xfrm>
           <a:prstGeom prst="rect">
@@ -2122,7 +2641,7 @@
         </p:nvSpPr>
         <p:spPr>
           <a:xfrm>
-            <a:off x="7150608" y="2423160"/>
+            <a:off x="6771026" y="3191256"/>
             <a:ext cx="475488" cy="475488"/>
           </a:xfrm>
           <a:prstGeom prst="rect">
@@ -2158,7 +2677,7 @@
         </p:nvSpPr>
         <p:spPr>
           <a:xfrm>
-            <a:off x="7680960" y="2423160"/>
+            <a:off x="7301378" y="3191256"/>
             <a:ext cx="475488" cy="475488"/>
           </a:xfrm>
           <a:prstGeom prst="rect">
@@ -2185,7 +2704,7 @@
         </p:nvSpPr>
         <p:spPr>
           <a:xfrm>
-            <a:off x="7680960" y="2423160"/>
+            <a:off x="7301378" y="3191256"/>
             <a:ext cx="475488" cy="475488"/>
           </a:xfrm>
           <a:prstGeom prst="rect">
@@ -2295,7 +2814,7 @@
           <a:bodyPr wrap="square" rtlCol="0" anchor="ctr"/>
           <a:lstStyle/>
           <a:p>
-            <a:pPr marL="0" indent="0">
+            <a:pPr marL="0" indent="0" algn="ctr">
               <a:buNone/>
             </a:pPr>
             <a:r>
@@ -2332,10 +2851,7 @@
             <a:avLst/>
           </a:prstGeom>
           <a:solidFill>
-            <a:schemeClr val="accent2">
-              <a:lumMod val="20000"/>
-              <a:lumOff val="80000"/>
-            </a:schemeClr>
+            <a:srgbClr val="A7C7FB"/>
           </a:solidFill>
           <a:ln/>
           <a:effectLst>
@@ -2493,10 +3009,7 @@
             <a:avLst/>
           </a:prstGeom>
           <a:solidFill>
-            <a:schemeClr val="accent2">
-              <a:lumMod val="20000"/>
-              <a:lumOff val="80000"/>
-            </a:schemeClr>
+            <a:srgbClr val="A7C7FB"/>
           </a:solidFill>
           <a:ln/>
           <a:effectLst>
@@ -2632,10 +3145,7 @@
             <a:avLst/>
           </a:prstGeom>
           <a:solidFill>
-            <a:schemeClr val="accent2">
-              <a:lumMod val="20000"/>
-              <a:lumOff val="80000"/>
-            </a:schemeClr>
+            <a:srgbClr val="A7C7FB"/>
           </a:solidFill>
           <a:ln/>
           <a:effectLst>
@@ -2793,10 +3303,7 @@
             <a:avLst/>
           </a:prstGeom>
           <a:solidFill>
-            <a:schemeClr val="accent2">
-              <a:lumMod val="20000"/>
-              <a:lumOff val="80000"/>
-            </a:schemeClr>
+            <a:srgbClr val="A7C7FB"/>
           </a:solidFill>
           <a:ln/>
           <a:effectLst>
@@ -2959,7 +3466,7 @@
         <p:spPr>
           <a:xfrm>
             <a:off x="457200" y="228600"/>
-            <a:ext cx="5486400" cy="594360"/>
+            <a:ext cx="8607056" cy="594360"/>
           </a:xfrm>
           <a:prstGeom prst="rect">
             <a:avLst/>
@@ -2971,7 +3478,7 @@
           <a:bodyPr wrap="square" rtlCol="0" anchor="ctr"/>
           <a:lstStyle/>
           <a:p>
-            <a:pPr marL="0" indent="0">
+            <a:pPr marL="0" indent="0" algn="ctr">
               <a:buNone/>
             </a:pPr>
             <a:r>
@@ -3642,7 +4149,7 @@
         </p:nvSpPr>
         <p:spPr>
           <a:xfrm>
-            <a:off x="5852160" y="822960"/>
+            <a:off x="6035040" y="1554480"/>
             <a:ext cx="2368296" cy="2368296"/>
           </a:xfrm>
           <a:prstGeom prst="rect">
@@ -3669,7 +4176,7 @@
         </p:nvSpPr>
         <p:spPr>
           <a:xfrm>
-            <a:off x="5916168" y="886968"/>
+            <a:off x="6099048" y="1618488"/>
             <a:ext cx="512064" cy="512064"/>
           </a:xfrm>
           <a:prstGeom prst="rect">
@@ -3696,7 +4203,7 @@
         </p:nvSpPr>
         <p:spPr>
           <a:xfrm>
-            <a:off x="6492240" y="886968"/>
+            <a:off x="6675120" y="1618488"/>
             <a:ext cx="512064" cy="512064"/>
           </a:xfrm>
           <a:prstGeom prst="rect">
@@ -3723,7 +4230,7 @@
         </p:nvSpPr>
         <p:spPr>
           <a:xfrm>
-            <a:off x="7068312" y="886968"/>
+            <a:off x="7251192" y="1618488"/>
             <a:ext cx="512064" cy="512064"/>
           </a:xfrm>
           <a:prstGeom prst="rect">
@@ -3750,7 +4257,7 @@
         </p:nvSpPr>
         <p:spPr>
           <a:xfrm>
-            <a:off x="7068312" y="886968"/>
+            <a:off x="7251192" y="1618488"/>
             <a:ext cx="512064" cy="512064"/>
           </a:xfrm>
           <a:prstGeom prst="rect">
@@ -3786,7 +4293,7 @@
         </p:nvSpPr>
         <p:spPr>
           <a:xfrm>
-            <a:off x="7644384" y="886968"/>
+            <a:off x="7827264" y="1618488"/>
             <a:ext cx="512064" cy="512064"/>
           </a:xfrm>
           <a:prstGeom prst="rect">
@@ -3813,7 +4320,7 @@
         </p:nvSpPr>
         <p:spPr>
           <a:xfrm>
-            <a:off x="7644384" y="886968"/>
+            <a:off x="7827264" y="1618488"/>
             <a:ext cx="512064" cy="512064"/>
           </a:xfrm>
           <a:prstGeom prst="rect">
@@ -3849,7 +4356,7 @@
         </p:nvSpPr>
         <p:spPr>
           <a:xfrm>
-            <a:off x="5916168" y="1463040"/>
+            <a:off x="6099048" y="2194560"/>
             <a:ext cx="512064" cy="512064"/>
           </a:xfrm>
           <a:prstGeom prst="rect">
@@ -3876,7 +4383,7 @@
         </p:nvSpPr>
         <p:spPr>
           <a:xfrm>
-            <a:off x="6492240" y="1463040"/>
+            <a:off x="6675120" y="2194560"/>
             <a:ext cx="512064" cy="512064"/>
           </a:xfrm>
           <a:prstGeom prst="rect">
@@ -3903,7 +4410,7 @@
         </p:nvSpPr>
         <p:spPr>
           <a:xfrm>
-            <a:off x="6492240" y="1463040"/>
+            <a:off x="6675120" y="2194560"/>
             <a:ext cx="512064" cy="512064"/>
           </a:xfrm>
           <a:prstGeom prst="rect">
@@ -3939,7 +4446,7 @@
         </p:nvSpPr>
         <p:spPr>
           <a:xfrm>
-            <a:off x="7068312" y="1463040"/>
+            <a:off x="7251192" y="2194560"/>
             <a:ext cx="512064" cy="512064"/>
           </a:xfrm>
           <a:prstGeom prst="rect">
@@ -3966,7 +4473,7 @@
         </p:nvSpPr>
         <p:spPr>
           <a:xfrm>
-            <a:off x="7068312" y="1463040"/>
+            <a:off x="7251192" y="2194560"/>
             <a:ext cx="512064" cy="512064"/>
           </a:xfrm>
           <a:prstGeom prst="rect">
@@ -4002,7 +4509,7 @@
         </p:nvSpPr>
         <p:spPr>
           <a:xfrm>
-            <a:off x="7644384" y="1463040"/>
+            <a:off x="7827264" y="2194560"/>
             <a:ext cx="512064" cy="512064"/>
           </a:xfrm>
           <a:prstGeom prst="rect">
@@ -4029,7 +4536,7 @@
         </p:nvSpPr>
         <p:spPr>
           <a:xfrm>
-            <a:off x="7644384" y="1463040"/>
+            <a:off x="7827264" y="2194560"/>
             <a:ext cx="512064" cy="512064"/>
           </a:xfrm>
           <a:prstGeom prst="rect">
@@ -4065,7 +4572,7 @@
         </p:nvSpPr>
         <p:spPr>
           <a:xfrm>
-            <a:off x="5916168" y="2039112"/>
+            <a:off x="6099048" y="2770632"/>
             <a:ext cx="512064" cy="512064"/>
           </a:xfrm>
           <a:prstGeom prst="rect">
@@ -4092,7 +4599,7 @@
         </p:nvSpPr>
         <p:spPr>
           <a:xfrm>
-            <a:off x="5916168" y="2039112"/>
+            <a:off x="6099048" y="2770632"/>
             <a:ext cx="512064" cy="512064"/>
           </a:xfrm>
           <a:prstGeom prst="rect">
@@ -4128,7 +4635,7 @@
         </p:nvSpPr>
         <p:spPr>
           <a:xfrm>
-            <a:off x="6492240" y="2039112"/>
+            <a:off x="6675120" y="2770632"/>
             <a:ext cx="512064" cy="512064"/>
           </a:xfrm>
           <a:prstGeom prst="rect">
@@ -4155,7 +4662,7 @@
         </p:nvSpPr>
         <p:spPr>
           <a:xfrm>
-            <a:off x="6492240" y="2039112"/>
+            <a:off x="6675120" y="2770632"/>
             <a:ext cx="512064" cy="512064"/>
           </a:xfrm>
           <a:prstGeom prst="rect">
@@ -4191,7 +4698,7 @@
         </p:nvSpPr>
         <p:spPr>
           <a:xfrm>
-            <a:off x="7068312" y="2039112"/>
+            <a:off x="7251192" y="2770632"/>
             <a:ext cx="512064" cy="512064"/>
           </a:xfrm>
           <a:prstGeom prst="rect">
@@ -4218,7 +4725,7 @@
         </p:nvSpPr>
         <p:spPr>
           <a:xfrm>
-            <a:off x="7068312" y="2039112"/>
+            <a:off x="7251192" y="2770632"/>
             <a:ext cx="512064" cy="512064"/>
           </a:xfrm>
           <a:prstGeom prst="rect">
@@ -4254,7 +4761,7 @@
         </p:nvSpPr>
         <p:spPr>
           <a:xfrm>
-            <a:off x="7644384" y="2039112"/>
+            <a:off x="7827264" y="2770632"/>
             <a:ext cx="512064" cy="512064"/>
           </a:xfrm>
           <a:prstGeom prst="rect">
@@ -4281,7 +4788,7 @@
         </p:nvSpPr>
         <p:spPr>
           <a:xfrm>
-            <a:off x="7644384" y="2039112"/>
+            <a:off x="7827264" y="2770632"/>
             <a:ext cx="512064" cy="512064"/>
           </a:xfrm>
           <a:prstGeom prst="rect">
@@ -4317,7 +4824,7 @@
         </p:nvSpPr>
         <p:spPr>
           <a:xfrm>
-            <a:off x="5916168" y="2615184"/>
+            <a:off x="6099048" y="3346704"/>
             <a:ext cx="512064" cy="512064"/>
           </a:xfrm>
           <a:prstGeom prst="rect">
@@ -4344,7 +4851,7 @@
         </p:nvSpPr>
         <p:spPr>
           <a:xfrm>
-            <a:off x="6492240" y="2615184"/>
+            <a:off x="6675120" y="3346704"/>
             <a:ext cx="512064" cy="512064"/>
           </a:xfrm>
           <a:prstGeom prst="rect">
@@ -4371,7 +4878,7 @@
         </p:nvSpPr>
         <p:spPr>
           <a:xfrm>
-            <a:off x="6492240" y="2615184"/>
+            <a:off x="6675120" y="3346704"/>
             <a:ext cx="512064" cy="512064"/>
           </a:xfrm>
           <a:prstGeom prst="rect">
@@ -4407,7 +4914,7 @@
         </p:nvSpPr>
         <p:spPr>
           <a:xfrm>
-            <a:off x="7068312" y="2615184"/>
+            <a:off x="7251192" y="3346704"/>
             <a:ext cx="512064" cy="512064"/>
           </a:xfrm>
           <a:prstGeom prst="rect">
@@ -4434,7 +4941,7 @@
         </p:nvSpPr>
         <p:spPr>
           <a:xfrm>
-            <a:off x="7068312" y="2615184"/>
+            <a:off x="7251192" y="3346704"/>
             <a:ext cx="512064" cy="512064"/>
           </a:xfrm>
           <a:prstGeom prst="rect">
@@ -4470,7 +4977,7 @@
         </p:nvSpPr>
         <p:spPr>
           <a:xfrm>
-            <a:off x="7644384" y="2615184"/>
+            <a:off x="7827264" y="3346704"/>
             <a:ext cx="512064" cy="512064"/>
           </a:xfrm>
           <a:prstGeom prst="rect">
@@ -4497,7 +5004,7 @@
         </p:nvSpPr>
         <p:spPr>
           <a:xfrm>
-            <a:off x="7644384" y="2615184"/>
+            <a:off x="7827264" y="3346704"/>
             <a:ext cx="512064" cy="512064"/>
           </a:xfrm>
           <a:prstGeom prst="rect">
@@ -4573,7 +5080,7 @@
         <p:spPr>
           <a:xfrm>
             <a:off x="457199" y="228600"/>
-            <a:ext cx="5847907" cy="594360"/>
+            <a:ext cx="8146455" cy="594360"/>
           </a:xfrm>
           <a:prstGeom prst="rect">
             <a:avLst/>
@@ -4585,7 +5092,7 @@
           <a:bodyPr wrap="square" rtlCol="0" anchor="ctr"/>
           <a:lstStyle/>
           <a:p>
-            <a:pPr marL="0" indent="0">
+            <a:pPr marL="0" indent="0" algn="ctr">
               <a:buNone/>
             </a:pPr>
             <a:r>
@@ -4798,98 +5305,6 @@
           </a:prstGeom>
         </p:spPr>
       </p:pic>
-      <p:sp>
-        <p:nvSpPr>
-          <p:cNvPr id="41" name="Text 2">
-            <a:extLst>
-              <a:ext uri="{FF2B5EF4-FFF2-40B4-BE49-F238E27FC236}">
-                <a16:creationId xmlns:a16="http://schemas.microsoft.com/office/drawing/2014/main" id="{3D9727A6-621F-1359-F2B3-6FA94848D3E8}"/>
-              </a:ext>
-            </a:extLst>
-          </p:cNvPr>
-          <p:cNvSpPr/>
-          <p:nvPr/>
-        </p:nvSpPr>
-        <p:spPr>
-          <a:xfrm>
-            <a:off x="1024127" y="1221256"/>
-            <a:ext cx="2858457" cy="274320"/>
-          </a:xfrm>
-          <a:prstGeom prst="rect">
-            <a:avLst/>
-          </a:prstGeom>
-          <a:noFill/>
-          <a:ln/>
-        </p:spPr>
-        <p:txBody>
-          <a:bodyPr wrap="square" rtlCol="0" anchor="ctr"/>
-          <a:lstStyle/>
-          <a:p>
-            <a:pPr marL="0" indent="0">
-              <a:buNone/>
-            </a:pPr>
-            <a:r>
-              <a:rPr lang="en-US" sz="1200" b="1" dirty="0">
-                <a:solidFill>
-                  <a:schemeClr val="bg1">
-                    <a:lumMod val="95000"/>
-                  </a:schemeClr>
-                </a:solidFill>
-                <a:latin typeface="Calibri" pitchFamily="34" charset="0"/>
-                <a:ea typeface="Calibri" pitchFamily="34" charset="-122"/>
-                <a:cs typeface="Calibri" pitchFamily="34" charset="-120"/>
-              </a:rPr>
-              <a:t>Gestion des inputs clavier </a:t>
-            </a:r>
-            <a:r>
-              <a:rPr lang="en-US" sz="1200" b="1" dirty="0" err="1">
-                <a:solidFill>
-                  <a:schemeClr val="bg1">
-                    <a:lumMod val="95000"/>
-                  </a:schemeClr>
-                </a:solidFill>
-                <a:latin typeface="Calibri" pitchFamily="34" charset="0"/>
-                <a:ea typeface="Calibri" pitchFamily="34" charset="-122"/>
-                <a:cs typeface="Calibri" pitchFamily="34" charset="-120"/>
-              </a:rPr>
-              <a:t>en</a:t>
-            </a:r>
-            <a:r>
-              <a:rPr lang="en-US" sz="1200" b="1" dirty="0">
-                <a:solidFill>
-                  <a:schemeClr val="bg1">
-                    <a:lumMod val="95000"/>
-                  </a:schemeClr>
-                </a:solidFill>
-                <a:latin typeface="Calibri" pitchFamily="34" charset="0"/>
-                <a:ea typeface="Calibri" pitchFamily="34" charset="-122"/>
-                <a:cs typeface="Calibri" pitchFamily="34" charset="-120"/>
-              </a:rPr>
-              <a:t> temps </a:t>
-            </a:r>
-            <a:r>
-              <a:rPr lang="en-US" sz="1200" b="1" dirty="0" err="1">
-                <a:solidFill>
-                  <a:schemeClr val="bg1">
-                    <a:lumMod val="95000"/>
-                  </a:schemeClr>
-                </a:solidFill>
-                <a:latin typeface="Calibri" pitchFamily="34" charset="0"/>
-                <a:ea typeface="Calibri" pitchFamily="34" charset="-122"/>
-                <a:cs typeface="Calibri" pitchFamily="34" charset="-120"/>
-              </a:rPr>
-              <a:t>réel</a:t>
-            </a:r>
-            <a:endParaRPr lang="en-US" sz="1200" dirty="0">
-              <a:solidFill>
-                <a:schemeClr val="bg1">
-                  <a:lumMod val="95000"/>
-                </a:schemeClr>
-              </a:solidFill>
-            </a:endParaRPr>
-          </a:p>
-        </p:txBody>
-      </p:sp>
       <p:pic>
         <p:nvPicPr>
           <p:cNvPr id="43" name="Image 42">
@@ -4929,150 +5344,6 @@
           <a:noFill/>
         </p:spPr>
       </p:pic>
-      <p:sp>
-        <p:nvSpPr>
-          <p:cNvPr id="45" name="Text 2">
-            <a:extLst>
-              <a:ext uri="{FF2B5EF4-FFF2-40B4-BE49-F238E27FC236}">
-                <a16:creationId xmlns:a16="http://schemas.microsoft.com/office/drawing/2014/main" id="{7B9491C1-C6D5-DF45-C3A2-060C2BF961FE}"/>
-              </a:ext>
-            </a:extLst>
-          </p:cNvPr>
-          <p:cNvSpPr/>
-          <p:nvPr/>
-        </p:nvSpPr>
-        <p:spPr>
-          <a:xfrm>
-            <a:off x="1024128" y="2174518"/>
-            <a:ext cx="3388384" cy="274320"/>
-          </a:xfrm>
-          <a:prstGeom prst="rect">
-            <a:avLst/>
-          </a:prstGeom>
-          <a:noFill/>
-          <a:ln/>
-        </p:spPr>
-        <p:txBody>
-          <a:bodyPr wrap="square" rtlCol="0" anchor="ctr"/>
-          <a:lstStyle/>
-          <a:p>
-            <a:pPr marL="0" indent="0">
-              <a:buNone/>
-            </a:pPr>
-            <a:r>
-              <a:rPr lang="en-US" sz="1200" b="1" dirty="0" err="1">
-                <a:solidFill>
-                  <a:schemeClr val="bg1">
-                    <a:lumMod val="95000"/>
-                  </a:schemeClr>
-                </a:solidFill>
-                <a:latin typeface="Calibri" pitchFamily="34" charset="0"/>
-                <a:ea typeface="Calibri" pitchFamily="34" charset="-122"/>
-                <a:cs typeface="Calibri" pitchFamily="34" charset="-120"/>
-              </a:rPr>
-              <a:t>Possibilité</a:t>
-            </a:r>
-            <a:r>
-              <a:rPr lang="en-US" sz="1200" b="1" dirty="0">
-                <a:solidFill>
-                  <a:schemeClr val="bg1">
-                    <a:lumMod val="95000"/>
-                  </a:schemeClr>
-                </a:solidFill>
-                <a:latin typeface="Calibri" pitchFamily="34" charset="0"/>
-                <a:ea typeface="Calibri" pitchFamily="34" charset="-122"/>
-                <a:cs typeface="Calibri" pitchFamily="34" charset="-120"/>
-              </a:rPr>
-              <a:t> de </a:t>
-            </a:r>
-            <a:r>
-              <a:rPr lang="en-US" sz="1200" b="1" dirty="0" err="1">
-                <a:solidFill>
-                  <a:schemeClr val="bg1">
-                    <a:lumMod val="95000"/>
-                  </a:schemeClr>
-                </a:solidFill>
-                <a:latin typeface="Calibri" pitchFamily="34" charset="0"/>
-                <a:ea typeface="Calibri" pitchFamily="34" charset="-122"/>
-                <a:cs typeface="Calibri" pitchFamily="34" charset="-120"/>
-              </a:rPr>
-              <a:t>rejouer</a:t>
-            </a:r>
-            <a:r>
-              <a:rPr lang="en-US" sz="1200" b="1" dirty="0">
-                <a:solidFill>
-                  <a:schemeClr val="bg1">
-                    <a:lumMod val="95000"/>
-                  </a:schemeClr>
-                </a:solidFill>
-                <a:latin typeface="Calibri" pitchFamily="34" charset="0"/>
-                <a:ea typeface="Calibri" pitchFamily="34" charset="-122"/>
-                <a:cs typeface="Calibri" pitchFamily="34" charset="-120"/>
-              </a:rPr>
-              <a:t> (</a:t>
-            </a:r>
-            <a:r>
-              <a:rPr lang="en-US" sz="1200" b="1" dirty="0" err="1">
-                <a:solidFill>
-                  <a:schemeClr val="bg1">
-                    <a:lumMod val="95000"/>
-                  </a:schemeClr>
-                </a:solidFill>
-                <a:latin typeface="Calibri" pitchFamily="34" charset="0"/>
-                <a:ea typeface="Calibri" pitchFamily="34" charset="-122"/>
-                <a:cs typeface="Calibri" pitchFamily="34" charset="-120"/>
-              </a:rPr>
-              <a:t>Sauvegarde</a:t>
-            </a:r>
-            <a:r>
-              <a:rPr lang="en-US" sz="1200" b="1" dirty="0">
-                <a:solidFill>
-                  <a:schemeClr val="bg1">
-                    <a:lumMod val="95000"/>
-                  </a:schemeClr>
-                </a:solidFill>
-                <a:latin typeface="Calibri" pitchFamily="34" charset="0"/>
-                <a:ea typeface="Calibri" pitchFamily="34" charset="-122"/>
-                <a:cs typeface="Calibri" pitchFamily="34" charset="-120"/>
-              </a:rPr>
-              <a:t> </a:t>
-            </a:r>
-            <a:r>
-              <a:rPr lang="en-US" sz="1200" b="1" dirty="0" err="1">
-                <a:solidFill>
-                  <a:schemeClr val="bg1">
-                    <a:lumMod val="95000"/>
-                  </a:schemeClr>
-                </a:solidFill>
-                <a:latin typeface="Calibri" pitchFamily="34" charset="0"/>
-                <a:ea typeface="Calibri" pitchFamily="34" charset="-122"/>
-                <a:cs typeface="Calibri" pitchFamily="34" charset="-120"/>
-              </a:rPr>
-              <a:t>fonctionnelle</a:t>
-            </a:r>
-            <a:r>
-              <a:rPr lang="en-US" sz="1200" b="1" dirty="0">
-                <a:solidFill>
-                  <a:schemeClr val="bg1">
-                    <a:lumMod val="95000"/>
-                  </a:schemeClr>
-                </a:solidFill>
-                <a:latin typeface="Calibri" pitchFamily="34" charset="0"/>
-                <a:ea typeface="Calibri" pitchFamily="34" charset="-122"/>
-                <a:cs typeface="Calibri" pitchFamily="34" charset="-120"/>
-              </a:rPr>
-              <a:t>)</a:t>
-            </a:r>
-            <a:endParaRPr lang="en-US" sz="1200" dirty="0">
-              <a:solidFill>
-                <a:schemeClr val="bg1">
-                  <a:lumMod val="95000"/>
-                </a:schemeClr>
-              </a:solidFill>
-            </a:endParaRPr>
-          </a:p>
-        </p:txBody>
-      </p:sp>
       <p:pic>
         <p:nvPicPr>
           <p:cNvPr id="47" name="Image 2" descr="preencoded.png">
@@ -5103,85 +5374,6 @@
           </a:prstGeom>
         </p:spPr>
       </p:pic>
-      <p:sp>
-        <p:nvSpPr>
-          <p:cNvPr id="49" name="Text 2">
-            <a:extLst>
-              <a:ext uri="{FF2B5EF4-FFF2-40B4-BE49-F238E27FC236}">
-                <a16:creationId xmlns:a16="http://schemas.microsoft.com/office/drawing/2014/main" id="{185248EC-6E59-6C86-B240-819B0AEF69A8}"/>
-              </a:ext>
-            </a:extLst>
-          </p:cNvPr>
-          <p:cNvSpPr/>
-          <p:nvPr/>
-        </p:nvSpPr>
-        <p:spPr>
-          <a:xfrm>
-            <a:off x="1024128" y="3127780"/>
-            <a:ext cx="3388384" cy="274320"/>
-          </a:xfrm>
-          <a:prstGeom prst="rect">
-            <a:avLst/>
-          </a:prstGeom>
-          <a:noFill/>
-          <a:ln/>
-        </p:spPr>
-        <p:txBody>
-          <a:bodyPr wrap="square" rtlCol="0" anchor="ctr"/>
-          <a:lstStyle/>
-          <a:p>
-            <a:pPr marL="0" indent="0">
-              <a:buNone/>
-            </a:pPr>
-            <a:r>
-              <a:rPr lang="en-US" sz="1200" b="1" dirty="0">
-                <a:solidFill>
-                  <a:schemeClr val="bg1">
-                    <a:lumMod val="95000"/>
-                  </a:schemeClr>
-                </a:solidFill>
-                <a:latin typeface="Calibri" pitchFamily="34" charset="0"/>
-                <a:ea typeface="Calibri" pitchFamily="34" charset="-122"/>
-                <a:cs typeface="Calibri" pitchFamily="34" charset="-120"/>
-              </a:rPr>
-              <a:t>Grille variable (Choix entre du 3x3, 4x4 </a:t>
-            </a:r>
-            <a:r>
-              <a:rPr lang="en-US" sz="1200" b="1" dirty="0" err="1">
-                <a:solidFill>
-                  <a:schemeClr val="bg1">
-                    <a:lumMod val="95000"/>
-                  </a:schemeClr>
-                </a:solidFill>
-                <a:latin typeface="Calibri" pitchFamily="34" charset="0"/>
-                <a:ea typeface="Calibri" pitchFamily="34" charset="-122"/>
-                <a:cs typeface="Calibri" pitchFamily="34" charset="-120"/>
-              </a:rPr>
-              <a:t>ou</a:t>
-            </a:r>
-            <a:r>
-              <a:rPr lang="en-US" sz="1200" b="1" dirty="0">
-                <a:solidFill>
-                  <a:schemeClr val="bg1">
-                    <a:lumMod val="95000"/>
-                  </a:schemeClr>
-                </a:solidFill>
-                <a:latin typeface="Calibri" pitchFamily="34" charset="0"/>
-                <a:ea typeface="Calibri" pitchFamily="34" charset="-122"/>
-                <a:cs typeface="Calibri" pitchFamily="34" charset="-120"/>
-              </a:rPr>
-              <a:t> du 5x5)</a:t>
-            </a:r>
-            <a:endParaRPr lang="en-US" sz="1200" dirty="0">
-              <a:solidFill>
-                <a:schemeClr val="bg1">
-                  <a:lumMod val="95000"/>
-                </a:schemeClr>
-              </a:solidFill>
-            </a:endParaRPr>
-          </a:p>
-        </p:txBody>
-      </p:sp>
       <p:pic>
         <p:nvPicPr>
           <p:cNvPr id="53" name="Image 52">
@@ -5221,111 +5413,6 @@
           <a:noFill/>
         </p:spPr>
       </p:pic>
-      <p:sp>
-        <p:nvSpPr>
-          <p:cNvPr id="55" name="Text 2">
-            <a:extLst>
-              <a:ext uri="{FF2B5EF4-FFF2-40B4-BE49-F238E27FC236}">
-                <a16:creationId xmlns:a16="http://schemas.microsoft.com/office/drawing/2014/main" id="{5CDEAF6A-20F0-870A-1F71-5F6307495538}"/>
-              </a:ext>
-            </a:extLst>
-          </p:cNvPr>
-          <p:cNvSpPr/>
-          <p:nvPr/>
-        </p:nvSpPr>
-        <p:spPr>
-          <a:xfrm>
-            <a:off x="1024128" y="4065748"/>
-            <a:ext cx="3388384" cy="274320"/>
-          </a:xfrm>
-          <a:prstGeom prst="rect">
-            <a:avLst/>
-          </a:prstGeom>
-          <a:noFill/>
-          <a:ln/>
-        </p:spPr>
-        <p:txBody>
-          <a:bodyPr wrap="square" rtlCol="0" anchor="ctr"/>
-          <a:lstStyle/>
-          <a:p>
-            <a:pPr marL="0" indent="0">
-              <a:buNone/>
-            </a:pPr>
-            <a:r>
-              <a:rPr lang="en-US" sz="1200" b="1" dirty="0">
-                <a:solidFill>
-                  <a:schemeClr val="bg1">
-                    <a:lumMod val="95000"/>
-                  </a:schemeClr>
-                </a:solidFill>
-                <a:latin typeface="Calibri" pitchFamily="34" charset="0"/>
-                <a:ea typeface="Calibri" pitchFamily="34" charset="-122"/>
-                <a:cs typeface="Calibri" pitchFamily="34" charset="-120"/>
-              </a:rPr>
-              <a:t>Gestion du score (</a:t>
-            </a:r>
-            <a:r>
-              <a:rPr lang="en-US" sz="1200" b="1" dirty="0" err="1">
-                <a:solidFill>
-                  <a:schemeClr val="bg1">
-                    <a:lumMod val="95000"/>
-                  </a:schemeClr>
-                </a:solidFill>
-                <a:latin typeface="Calibri" pitchFamily="34" charset="0"/>
-                <a:ea typeface="Calibri" pitchFamily="34" charset="-122"/>
-                <a:cs typeface="Calibri" pitchFamily="34" charset="-120"/>
-              </a:rPr>
-              <a:t>calcul</a:t>
-            </a:r>
-            <a:r>
-              <a:rPr lang="en-US" sz="1200" b="1" dirty="0">
-                <a:solidFill>
-                  <a:schemeClr val="bg1">
-                    <a:lumMod val="95000"/>
-                  </a:schemeClr>
-                </a:solidFill>
-                <a:latin typeface="Calibri" pitchFamily="34" charset="0"/>
-                <a:ea typeface="Calibri" pitchFamily="34" charset="-122"/>
-                <a:cs typeface="Calibri" pitchFamily="34" charset="-120"/>
-              </a:rPr>
-              <a:t> + </a:t>
-            </a:r>
-            <a:r>
-              <a:rPr lang="en-US" sz="1200" b="1" dirty="0" err="1">
-                <a:solidFill>
-                  <a:schemeClr val="bg1">
-                    <a:lumMod val="95000"/>
-                  </a:schemeClr>
-                </a:solidFill>
-                <a:latin typeface="Calibri" pitchFamily="34" charset="0"/>
-                <a:ea typeface="Calibri" pitchFamily="34" charset="-122"/>
-                <a:cs typeface="Calibri" pitchFamily="34" charset="-120"/>
-              </a:rPr>
-              <a:t>affichage</a:t>
-            </a:r>
-            <a:r>
-              <a:rPr lang="en-US" sz="1200" b="1" dirty="0">
-                <a:solidFill>
-                  <a:schemeClr val="bg1">
-                    <a:lumMod val="95000"/>
-                  </a:schemeClr>
-                </a:solidFill>
-                <a:latin typeface="Calibri" pitchFamily="34" charset="0"/>
-                <a:ea typeface="Calibri" pitchFamily="34" charset="-122"/>
-                <a:cs typeface="Calibri" pitchFamily="34" charset="-120"/>
-              </a:rPr>
-              <a:t>)</a:t>
-            </a:r>
-            <a:endParaRPr lang="en-US" sz="1200" dirty="0">
-              <a:solidFill>
-                <a:schemeClr val="bg1">
-                  <a:lumMod val="95000"/>
-                </a:schemeClr>
-              </a:solidFill>
-            </a:endParaRPr>
-          </a:p>
-        </p:txBody>
-      </p:sp>
       <p:pic>
         <p:nvPicPr>
           <p:cNvPr id="57" name="Image 56">
@@ -5356,6 +5443,366 @@
           </a:prstGeom>
         </p:spPr>
       </p:pic>
+      <p:sp>
+        <p:nvSpPr>
+          <p:cNvPr id="3" name="ZoneTexte 2">
+            <a:extLst>
+              <a:ext uri="{FF2B5EF4-FFF2-40B4-BE49-F238E27FC236}">
+                <a16:creationId xmlns:a16="http://schemas.microsoft.com/office/drawing/2014/main" id="{4844D1BB-761E-E45B-11A9-B7DF68933AA2}"/>
+              </a:ext>
+            </a:extLst>
+          </p:cNvPr>
+          <p:cNvSpPr txBox="1"/>
+          <p:nvPr/>
+        </p:nvSpPr>
+        <p:spPr>
+          <a:xfrm>
+            <a:off x="960120" y="1219916"/>
+            <a:ext cx="4572000" cy="276999"/>
+          </a:xfrm>
+          <a:prstGeom prst="rect">
+            <a:avLst/>
+          </a:prstGeom>
+          <a:noFill/>
+        </p:spPr>
+        <p:txBody>
+          <a:bodyPr wrap="square">
+            <a:spAutoFit/>
+          </a:bodyPr>
+          <a:lstStyle/>
+          <a:p>
+            <a:pPr marL="0" indent="0">
+              <a:buNone/>
+            </a:pPr>
+            <a:r>
+              <a:rPr lang="en-US" sz="1200" dirty="0">
+                <a:solidFill>
+                  <a:srgbClr val="94A3B8"/>
+                </a:solidFill>
+                <a:latin typeface="Calibri" pitchFamily="34" charset="0"/>
+                <a:ea typeface="Calibri" pitchFamily="34" charset="-122"/>
+                <a:cs typeface="Calibri" pitchFamily="34" charset="-120"/>
+              </a:rPr>
+              <a:t>Gestion des inputs clavier </a:t>
+            </a:r>
+            <a:r>
+              <a:rPr lang="en-US" sz="1200" dirty="0" err="1">
+                <a:solidFill>
+                  <a:srgbClr val="94A3B8"/>
+                </a:solidFill>
+                <a:latin typeface="Calibri" pitchFamily="34" charset="0"/>
+                <a:ea typeface="Calibri" pitchFamily="34" charset="-122"/>
+                <a:cs typeface="Calibri" pitchFamily="34" charset="-120"/>
+              </a:rPr>
+              <a:t>en</a:t>
+            </a:r>
+            <a:r>
+              <a:rPr lang="en-US" sz="1200" dirty="0">
+                <a:solidFill>
+                  <a:srgbClr val="94A3B8"/>
+                </a:solidFill>
+                <a:latin typeface="Calibri" pitchFamily="34" charset="0"/>
+                <a:ea typeface="Calibri" pitchFamily="34" charset="-122"/>
+                <a:cs typeface="Calibri" pitchFamily="34" charset="-120"/>
+              </a:rPr>
+              <a:t> temps </a:t>
+            </a:r>
+            <a:r>
+              <a:rPr lang="en-US" sz="1200" dirty="0" err="1">
+                <a:solidFill>
+                  <a:srgbClr val="94A3B8"/>
+                </a:solidFill>
+                <a:latin typeface="Calibri" pitchFamily="34" charset="0"/>
+                <a:ea typeface="Calibri" pitchFamily="34" charset="-122"/>
+                <a:cs typeface="Calibri" pitchFamily="34" charset="-120"/>
+              </a:rPr>
+              <a:t>réel</a:t>
+            </a:r>
+            <a:endParaRPr lang="en-US" sz="1200" dirty="0"/>
+          </a:p>
+        </p:txBody>
+      </p:sp>
+      <p:sp>
+        <p:nvSpPr>
+          <p:cNvPr id="5" name="ZoneTexte 4">
+            <a:extLst>
+              <a:ext uri="{FF2B5EF4-FFF2-40B4-BE49-F238E27FC236}">
+                <a16:creationId xmlns:a16="http://schemas.microsoft.com/office/drawing/2014/main" id="{5964878B-C3F0-666A-CE9D-C48059364A7A}"/>
+              </a:ext>
+            </a:extLst>
+          </p:cNvPr>
+          <p:cNvSpPr txBox="1"/>
+          <p:nvPr/>
+        </p:nvSpPr>
+        <p:spPr>
+          <a:xfrm>
+            <a:off x="960120" y="2200121"/>
+            <a:ext cx="4572000" cy="276999"/>
+          </a:xfrm>
+          <a:prstGeom prst="rect">
+            <a:avLst/>
+          </a:prstGeom>
+          <a:noFill/>
+        </p:spPr>
+        <p:txBody>
+          <a:bodyPr wrap="square">
+            <a:spAutoFit/>
+          </a:bodyPr>
+          <a:lstStyle/>
+          <a:p>
+            <a:pPr marL="0" indent="0">
+              <a:buNone/>
+            </a:pPr>
+            <a:r>
+              <a:rPr lang="en-US" sz="1200" dirty="0" err="1">
+                <a:solidFill>
+                  <a:srgbClr val="94A3B8"/>
+                </a:solidFill>
+                <a:latin typeface="Calibri" pitchFamily="34" charset="0"/>
+                <a:ea typeface="Calibri" pitchFamily="34" charset="-122"/>
+                <a:cs typeface="Calibri" pitchFamily="34" charset="-120"/>
+              </a:rPr>
+              <a:t>Possibilité</a:t>
+            </a:r>
+            <a:r>
+              <a:rPr lang="en-US" sz="1200" dirty="0">
+                <a:solidFill>
+                  <a:srgbClr val="94A3B8"/>
+                </a:solidFill>
+                <a:latin typeface="Calibri" pitchFamily="34" charset="0"/>
+                <a:ea typeface="Calibri" pitchFamily="34" charset="-122"/>
+                <a:cs typeface="Calibri" pitchFamily="34" charset="-120"/>
+              </a:rPr>
+              <a:t> de </a:t>
+            </a:r>
+            <a:r>
+              <a:rPr lang="en-US" sz="1200" dirty="0" err="1">
+                <a:solidFill>
+                  <a:srgbClr val="94A3B8"/>
+                </a:solidFill>
+                <a:latin typeface="Calibri" pitchFamily="34" charset="0"/>
+                <a:ea typeface="Calibri" pitchFamily="34" charset="-122"/>
+                <a:cs typeface="Calibri" pitchFamily="34" charset="-120"/>
+              </a:rPr>
+              <a:t>rejouer</a:t>
+            </a:r>
+            <a:r>
+              <a:rPr lang="en-US" sz="1200" dirty="0">
+                <a:solidFill>
+                  <a:srgbClr val="94A3B8"/>
+                </a:solidFill>
+                <a:latin typeface="Calibri" pitchFamily="34" charset="0"/>
+                <a:ea typeface="Calibri" pitchFamily="34" charset="-122"/>
+                <a:cs typeface="Calibri" pitchFamily="34" charset="-120"/>
+              </a:rPr>
+              <a:t> (</a:t>
+            </a:r>
+            <a:r>
+              <a:rPr lang="en-US" sz="1200" dirty="0" err="1">
+                <a:solidFill>
+                  <a:srgbClr val="94A3B8"/>
+                </a:solidFill>
+                <a:latin typeface="Calibri" pitchFamily="34" charset="0"/>
+                <a:ea typeface="Calibri" pitchFamily="34" charset="-122"/>
+                <a:cs typeface="Calibri" pitchFamily="34" charset="-120"/>
+              </a:rPr>
+              <a:t>Sauvegarde</a:t>
+            </a:r>
+            <a:r>
+              <a:rPr lang="en-US" sz="1200" dirty="0">
+                <a:solidFill>
+                  <a:srgbClr val="94A3B8"/>
+                </a:solidFill>
+                <a:latin typeface="Calibri" pitchFamily="34" charset="0"/>
+                <a:ea typeface="Calibri" pitchFamily="34" charset="-122"/>
+                <a:cs typeface="Calibri" pitchFamily="34" charset="-120"/>
+              </a:rPr>
+              <a:t> </a:t>
+            </a:r>
+            <a:r>
+              <a:rPr lang="en-US" sz="1200" dirty="0" err="1">
+                <a:solidFill>
+                  <a:srgbClr val="94A3B8"/>
+                </a:solidFill>
+                <a:latin typeface="Calibri" pitchFamily="34" charset="0"/>
+                <a:ea typeface="Calibri" pitchFamily="34" charset="-122"/>
+                <a:cs typeface="Calibri" pitchFamily="34" charset="-120"/>
+              </a:rPr>
+              <a:t>fonctionnelle</a:t>
+            </a:r>
+            <a:r>
+              <a:rPr lang="en-US" sz="1200" dirty="0">
+                <a:solidFill>
+                  <a:srgbClr val="94A3B8"/>
+                </a:solidFill>
+                <a:latin typeface="Calibri" pitchFamily="34" charset="0"/>
+                <a:ea typeface="Calibri" pitchFamily="34" charset="-122"/>
+                <a:cs typeface="Calibri" pitchFamily="34" charset="-120"/>
+              </a:rPr>
+              <a:t>)</a:t>
+            </a:r>
+            <a:endParaRPr lang="en-US" sz="1200" dirty="0"/>
+          </a:p>
+        </p:txBody>
+      </p:sp>
+      <p:sp>
+        <p:nvSpPr>
+          <p:cNvPr id="7" name="ZoneTexte 6">
+            <a:extLst>
+              <a:ext uri="{FF2B5EF4-FFF2-40B4-BE49-F238E27FC236}">
+                <a16:creationId xmlns:a16="http://schemas.microsoft.com/office/drawing/2014/main" id="{F7DC5DB9-6BCA-B973-4FC1-45976CCCF274}"/>
+              </a:ext>
+            </a:extLst>
+          </p:cNvPr>
+          <p:cNvSpPr txBox="1"/>
+          <p:nvPr/>
+        </p:nvSpPr>
+        <p:spPr>
+          <a:xfrm>
+            <a:off x="960120" y="3155097"/>
+            <a:ext cx="4572000" cy="276999"/>
+          </a:xfrm>
+          <a:prstGeom prst="rect">
+            <a:avLst/>
+          </a:prstGeom>
+          <a:noFill/>
+        </p:spPr>
+        <p:txBody>
+          <a:bodyPr wrap="square">
+            <a:spAutoFit/>
+          </a:bodyPr>
+          <a:lstStyle/>
+          <a:p>
+            <a:pPr marL="0" indent="0">
+              <a:buNone/>
+            </a:pPr>
+            <a:r>
+              <a:rPr lang="en-US" sz="1200" dirty="0">
+                <a:solidFill>
+                  <a:srgbClr val="94A3B8"/>
+                </a:solidFill>
+                <a:latin typeface="Calibri" pitchFamily="34" charset="0"/>
+                <a:ea typeface="Calibri" pitchFamily="34" charset="-122"/>
+                <a:cs typeface="Calibri" pitchFamily="34" charset="-120"/>
+              </a:rPr>
+              <a:t>Grille variable (choix entre du 3x3, 4x4 </a:t>
+            </a:r>
+            <a:r>
+              <a:rPr lang="en-US" sz="1200" dirty="0" err="1">
+                <a:solidFill>
+                  <a:srgbClr val="94A3B8"/>
+                </a:solidFill>
+                <a:latin typeface="Calibri" pitchFamily="34" charset="0"/>
+                <a:ea typeface="Calibri" pitchFamily="34" charset="-122"/>
+                <a:cs typeface="Calibri" pitchFamily="34" charset="-120"/>
+              </a:rPr>
+              <a:t>ou</a:t>
+            </a:r>
+            <a:r>
+              <a:rPr lang="en-US" sz="1200" dirty="0">
+                <a:solidFill>
+                  <a:srgbClr val="94A3B8"/>
+                </a:solidFill>
+                <a:latin typeface="Calibri" pitchFamily="34" charset="0"/>
+                <a:ea typeface="Calibri" pitchFamily="34" charset="-122"/>
+                <a:cs typeface="Calibri" pitchFamily="34" charset="-120"/>
+              </a:rPr>
+              <a:t> du 5x5)</a:t>
+            </a:r>
+            <a:endParaRPr lang="en-US" sz="1200" dirty="0"/>
+          </a:p>
+        </p:txBody>
+      </p:sp>
+      <p:sp>
+        <p:nvSpPr>
+          <p:cNvPr id="9" name="ZoneTexte 8">
+            <a:extLst>
+              <a:ext uri="{FF2B5EF4-FFF2-40B4-BE49-F238E27FC236}">
+                <a16:creationId xmlns:a16="http://schemas.microsoft.com/office/drawing/2014/main" id="{853745DF-69C0-BC95-E626-4C10BBA09DA7}"/>
+              </a:ext>
+            </a:extLst>
+          </p:cNvPr>
+          <p:cNvSpPr txBox="1"/>
+          <p:nvPr/>
+        </p:nvSpPr>
+        <p:spPr>
+          <a:xfrm>
+            <a:off x="960120" y="4079702"/>
+            <a:ext cx="4572000" cy="276999"/>
+          </a:xfrm>
+          <a:prstGeom prst="rect">
+            <a:avLst/>
+          </a:prstGeom>
+          <a:noFill/>
+        </p:spPr>
+        <p:txBody>
+          <a:bodyPr wrap="square">
+            <a:spAutoFit/>
+          </a:bodyPr>
+          <a:lstStyle/>
+          <a:p>
+            <a:pPr marL="0" indent="0">
+              <a:buNone/>
+            </a:pPr>
+            <a:r>
+              <a:rPr lang="en-US" sz="1200" dirty="0">
+                <a:solidFill>
+                  <a:srgbClr val="94A3B8"/>
+                </a:solidFill>
+                <a:latin typeface="Calibri" pitchFamily="34" charset="0"/>
+                <a:ea typeface="Calibri" pitchFamily="34" charset="-122"/>
+                <a:cs typeface="Calibri" pitchFamily="34" charset="-120"/>
+              </a:rPr>
+              <a:t>Gestion du score (</a:t>
+            </a:r>
+            <a:r>
+              <a:rPr lang="en-US" sz="1200" dirty="0" err="1">
+                <a:solidFill>
+                  <a:srgbClr val="94A3B8"/>
+                </a:solidFill>
+                <a:latin typeface="Calibri" pitchFamily="34" charset="0"/>
+                <a:ea typeface="Calibri" pitchFamily="34" charset="-122"/>
+                <a:cs typeface="Calibri" pitchFamily="34" charset="-120"/>
+              </a:rPr>
+              <a:t>calcul</a:t>
+            </a:r>
+            <a:r>
+              <a:rPr lang="en-US" sz="1200" dirty="0">
+                <a:solidFill>
+                  <a:srgbClr val="94A3B8"/>
+                </a:solidFill>
+                <a:latin typeface="Calibri" pitchFamily="34" charset="0"/>
+                <a:ea typeface="Calibri" pitchFamily="34" charset="-122"/>
+                <a:cs typeface="Calibri" pitchFamily="34" charset="-120"/>
+              </a:rPr>
+              <a:t> + </a:t>
+            </a:r>
+            <a:r>
+              <a:rPr lang="en-US" sz="1200" dirty="0" err="1">
+                <a:solidFill>
+                  <a:srgbClr val="94A3B8"/>
+                </a:solidFill>
+                <a:latin typeface="Calibri" pitchFamily="34" charset="0"/>
+                <a:ea typeface="Calibri" pitchFamily="34" charset="-122"/>
+                <a:cs typeface="Calibri" pitchFamily="34" charset="-120"/>
+              </a:rPr>
+              <a:t>affichage</a:t>
+            </a:r>
+            <a:r>
+              <a:rPr lang="en-US" sz="1200" dirty="0">
+                <a:solidFill>
+                  <a:srgbClr val="94A3B8"/>
+                </a:solidFill>
+                <a:latin typeface="Calibri" pitchFamily="34" charset="0"/>
+                <a:ea typeface="Calibri" pitchFamily="34" charset="-122"/>
+                <a:cs typeface="Calibri" pitchFamily="34" charset="-120"/>
+              </a:rPr>
+              <a:t>)</a:t>
+            </a:r>
+            <a:endParaRPr lang="en-US" sz="1200" dirty="0"/>
+          </a:p>
+        </p:txBody>
+      </p:sp>
     </p:spTree>
   </p:cSld>
   <p:clrMapOvr>
@@ -5410,7 +5857,7 @@
           <a:bodyPr wrap="square" rtlCol="0" anchor="ctr"/>
           <a:lstStyle/>
           <a:p>
-            <a:pPr marL="0" indent="0">
+            <a:pPr marL="0" indent="0" algn="ctr">
               <a:buNone/>
             </a:pPr>
             <a:r>
@@ -5444,14 +5891,14 @@
         </p:nvSpPr>
         <p:spPr>
           <a:xfrm>
-            <a:off x="365760" y="987552"/>
+            <a:off x="365760" y="1115568"/>
             <a:ext cx="8412480" cy="804672"/>
           </a:xfrm>
           <a:prstGeom prst="rect">
             <a:avLst/>
           </a:prstGeom>
           <a:solidFill>
-            <a:schemeClr val="accent5"/>
+            <a:srgbClr val="1E293B"/>
           </a:solidFill>
           <a:ln/>
           <a:effectLst>
@@ -5486,7 +5933,7 @@
         </p:blipFill>
         <p:spPr>
           <a:xfrm>
-            <a:off x="502920" y="1152144"/>
+            <a:off x="502920" y="1280160"/>
             <a:ext cx="292608" cy="292608"/>
           </a:xfrm>
           <a:prstGeom prst="rect">
@@ -5502,7 +5949,7 @@
         </p:nvSpPr>
         <p:spPr>
           <a:xfrm>
-            <a:off x="886968" y="1152144"/>
+            <a:off x="886968" y="1280160"/>
             <a:ext cx="3474720" cy="292608"/>
           </a:xfrm>
           <a:prstGeom prst="rect">
@@ -5521,7 +5968,7 @@
             <a:r>
               <a:rPr lang="en-US" sz="1200" b="1" dirty="0">
                 <a:solidFill>
-                  <a:srgbClr val="1E293B"/>
+                  <a:schemeClr val="bg2"/>
                 </a:solidFill>
                 <a:latin typeface="Calibri" pitchFamily="34" charset="0"/>
                 <a:ea typeface="Calibri" pitchFamily="34" charset="-122"/>
@@ -5529,7 +5976,11 @@
               </a:rPr>
               <a:t>Bug de "saut" des tuiles</a:t>
             </a:r>
-            <a:endParaRPr lang="en-US" sz="1200" dirty="0"/>
+            <a:endParaRPr lang="en-US" sz="1200" dirty="0">
+              <a:solidFill>
+                <a:schemeClr val="bg2"/>
+              </a:solidFill>
+            </a:endParaRPr>
           </a:p>
         </p:txBody>
       </p:sp>
@@ -5549,7 +6000,7 @@
         </p:blipFill>
         <p:spPr>
           <a:xfrm>
-            <a:off x="4572000" y="1152144"/>
+            <a:off x="4572000" y="1280160"/>
             <a:ext cx="292608" cy="292608"/>
           </a:xfrm>
           <a:prstGeom prst="rect">
@@ -5565,7 +6016,7 @@
         </p:nvSpPr>
         <p:spPr>
           <a:xfrm>
-            <a:off x="4956048" y="1060704"/>
+            <a:off x="4956048" y="1188720"/>
             <a:ext cx="3657600" cy="594360"/>
           </a:xfrm>
           <a:prstGeom prst="rect">
@@ -5604,14 +6055,14 @@
         </p:nvSpPr>
         <p:spPr>
           <a:xfrm>
-            <a:off x="365760" y="1920240"/>
+            <a:off x="365760" y="2048256"/>
             <a:ext cx="8412480" cy="804672"/>
           </a:xfrm>
           <a:prstGeom prst="rect">
             <a:avLst/>
           </a:prstGeom>
           <a:solidFill>
-            <a:schemeClr val="accent5"/>
+            <a:srgbClr val="1E293B"/>
           </a:solidFill>
           <a:ln/>
           <a:effectLst>
@@ -5646,7 +6097,7 @@
         </p:blipFill>
         <p:spPr>
           <a:xfrm>
-            <a:off x="502920" y="2084832"/>
+            <a:off x="502920" y="2212848"/>
             <a:ext cx="292608" cy="292608"/>
           </a:xfrm>
           <a:prstGeom prst="rect">
@@ -5662,7 +6113,7 @@
         </p:nvSpPr>
         <p:spPr>
           <a:xfrm>
-            <a:off x="886968" y="2100781"/>
+            <a:off x="886968" y="2228797"/>
             <a:ext cx="3474720" cy="292608"/>
           </a:xfrm>
           <a:prstGeom prst="rect">
@@ -5681,7 +6132,7 @@
             <a:r>
               <a:rPr lang="en-US" sz="1200" b="1" dirty="0">
                 <a:solidFill>
-                  <a:srgbClr val="1E293B"/>
+                  <a:schemeClr val="bg2"/>
                 </a:solidFill>
                 <a:latin typeface="Calibri" pitchFamily="34" charset="0"/>
                 <a:ea typeface="Calibri" pitchFamily="34" charset="-122"/>
@@ -5689,7 +6140,11 @@
               </a:rPr>
               <a:t>Déplacements haut/bas</a:t>
             </a:r>
-            <a:endParaRPr lang="en-US" sz="1200" dirty="0"/>
+            <a:endParaRPr lang="en-US" sz="1200" dirty="0">
+              <a:solidFill>
+                <a:schemeClr val="bg2"/>
+              </a:solidFill>
+            </a:endParaRPr>
           </a:p>
         </p:txBody>
       </p:sp>
@@ -5709,7 +6164,7 @@
         </p:blipFill>
         <p:spPr>
           <a:xfrm>
-            <a:off x="4572000" y="2084832"/>
+            <a:off x="4572000" y="2212848"/>
             <a:ext cx="292608" cy="292608"/>
           </a:xfrm>
           <a:prstGeom prst="rect">
@@ -5725,7 +6180,7 @@
         </p:nvSpPr>
         <p:spPr>
           <a:xfrm>
-            <a:off x="4956048" y="1993392"/>
+            <a:off x="4956048" y="2121408"/>
             <a:ext cx="3657600" cy="594360"/>
           </a:xfrm>
           <a:prstGeom prst="rect">
@@ -5764,14 +6219,14 @@
         </p:nvSpPr>
         <p:spPr>
           <a:xfrm>
-            <a:off x="365760" y="2852928"/>
+            <a:off x="365760" y="2980944"/>
             <a:ext cx="8412480" cy="804672"/>
           </a:xfrm>
           <a:prstGeom prst="rect">
             <a:avLst/>
           </a:prstGeom>
           <a:solidFill>
-            <a:schemeClr val="accent5"/>
+            <a:srgbClr val="1E293B"/>
           </a:solidFill>
           <a:ln/>
           <a:effectLst>
@@ -5806,7 +6261,7 @@
         </p:blipFill>
         <p:spPr>
           <a:xfrm>
-            <a:off x="502920" y="3017520"/>
+            <a:off x="502920" y="3145536"/>
             <a:ext cx="292608" cy="292608"/>
           </a:xfrm>
           <a:prstGeom prst="rect">
@@ -5822,7 +6277,7 @@
         </p:nvSpPr>
         <p:spPr>
           <a:xfrm>
-            <a:off x="886968" y="3017520"/>
+            <a:off x="886968" y="3145536"/>
             <a:ext cx="3474720" cy="292608"/>
           </a:xfrm>
           <a:prstGeom prst="rect">
@@ -5841,7 +6296,7 @@
             <a:r>
               <a:rPr lang="en-US" sz="1200" b="1" dirty="0">
                 <a:solidFill>
-                  <a:srgbClr val="1E293B"/>
+                  <a:schemeClr val="bg2"/>
                 </a:solidFill>
                 <a:latin typeface="Calibri" pitchFamily="34" charset="0"/>
                 <a:ea typeface="Calibri" pitchFamily="34" charset="-122"/>
@@ -5849,7 +6304,11 @@
               </a:rPr>
               <a:t>Sauvegarde multi-taille</a:t>
             </a:r>
-            <a:endParaRPr lang="en-US" sz="1200" dirty="0"/>
+            <a:endParaRPr lang="en-US" sz="1200" dirty="0">
+              <a:solidFill>
+                <a:schemeClr val="bg2"/>
+              </a:solidFill>
+            </a:endParaRPr>
           </a:p>
         </p:txBody>
       </p:sp>
@@ -5869,7 +6328,7 @@
         </p:blipFill>
         <p:spPr>
           <a:xfrm>
-            <a:off x="4572000" y="3017520"/>
+            <a:off x="4572000" y="3145536"/>
             <a:ext cx="292608" cy="292608"/>
           </a:xfrm>
           <a:prstGeom prst="rect">
@@ -5885,7 +6344,7 @@
         </p:nvSpPr>
         <p:spPr>
           <a:xfrm>
-            <a:off x="4956048" y="2926080"/>
+            <a:off x="4956048" y="3054096"/>
             <a:ext cx="3657600" cy="594360"/>
           </a:xfrm>
           <a:prstGeom prst="rect">
@@ -5910,157 +6369,19 @@
                 <a:ea typeface="Calibri" pitchFamily="34" charset="-122"/>
                 <a:cs typeface="Calibri" pitchFamily="34" charset="-120"/>
               </a:rPr>
-              <a:t>Stocker TAILLE dans save.txt, recréer la grille avant chargement</a:t>
-            </a:r>
-            <a:endParaRPr lang="en-US" sz="1100" dirty="0"/>
-          </a:p>
-        </p:txBody>
-      </p:sp>
-      <p:sp>
-        <p:nvSpPr>
-          <p:cNvPr id="18" name="Shape 10"/>
-          <p:cNvSpPr/>
-          <p:nvPr/>
-        </p:nvSpPr>
-        <p:spPr>
-          <a:xfrm>
-            <a:off x="365760" y="3785616"/>
-            <a:ext cx="8412480" cy="804672"/>
-          </a:xfrm>
-          <a:prstGeom prst="rect">
-            <a:avLst/>
-          </a:prstGeom>
-          <a:solidFill>
-            <a:schemeClr val="accent5"/>
-          </a:solidFill>
-          <a:ln/>
-          <a:effectLst>
-            <a:outerShdw blurRad="76200" dist="25400" dir="2700000" algn="bl" rotWithShape="0">
-              <a:srgbClr val="000000">
-                <a:alpha val="8000"/>
-              </a:srgbClr>
-            </a:outerShdw>
-          </a:effectLst>
-        </p:spPr>
-        <p:txBody>
-          <a:bodyPr/>
-          <a:lstStyle/>
-          <a:p>
-            <a:endParaRPr lang="fr-FR"/>
-          </a:p>
-        </p:txBody>
-      </p:sp>
-      <p:pic>
-        <p:nvPicPr>
-          <p:cNvPr id="19" name="Image 6" descr="preencoded.png"/>
-          <p:cNvPicPr>
-            <a:picLocks noChangeAspect="1"/>
-          </p:cNvPicPr>
-          <p:nvPr/>
-        </p:nvPicPr>
-        <p:blipFill>
-          <a:blip r:embed="rId7"/>
-          <a:stretch>
-            <a:fillRect/>
-          </a:stretch>
-        </p:blipFill>
-        <p:spPr>
-          <a:xfrm>
-            <a:off x="502920" y="3950208"/>
-            <a:ext cx="292608" cy="292608"/>
-          </a:xfrm>
-          <a:prstGeom prst="rect">
-            <a:avLst/>
-          </a:prstGeom>
-        </p:spPr>
-      </p:pic>
-      <p:sp>
-        <p:nvSpPr>
-          <p:cNvPr id="20" name="Text 11"/>
-          <p:cNvSpPr/>
-          <p:nvPr/>
-        </p:nvSpPr>
-        <p:spPr>
-          <a:xfrm>
-            <a:off x="886968" y="3950208"/>
-            <a:ext cx="3474720" cy="292608"/>
-          </a:xfrm>
-          <a:prstGeom prst="rect">
-            <a:avLst/>
-          </a:prstGeom>
-          <a:noFill/>
-          <a:ln/>
-        </p:spPr>
-        <p:txBody>
-          <a:bodyPr wrap="square" rtlCol="0" anchor="ctr"/>
-          <a:lstStyle/>
-          <a:p>
-            <a:pPr marL="0" indent="0">
-              <a:buNone/>
-            </a:pPr>
-            <a:r>
-              <a:rPr lang="en-US" sz="1200" b="1" dirty="0">
-                <a:solidFill>
-                  <a:srgbClr val="1E293B"/>
-                </a:solidFill>
-                <a:latin typeface="Calibri" pitchFamily="34" charset="0"/>
-                <a:ea typeface="Calibri" pitchFamily="34" charset="-122"/>
-                <a:cs typeface="Calibri" pitchFamily="34" charset="-120"/>
-              </a:rPr>
-              <a:t>Organisation du code</a:t>
-            </a:r>
-            <a:endParaRPr lang="en-US" sz="1200" dirty="0"/>
-          </a:p>
-        </p:txBody>
-      </p:sp>
-      <p:pic>
-        <p:nvPicPr>
-          <p:cNvPr id="21" name="Image 7" descr="preencoded.png"/>
-          <p:cNvPicPr>
-            <a:picLocks noChangeAspect="1"/>
-          </p:cNvPicPr>
-          <p:nvPr/>
-        </p:nvPicPr>
-        <p:blipFill>
-          <a:blip r:embed="rId4"/>
-          <a:stretch>
-            <a:fillRect/>
-          </a:stretch>
-        </p:blipFill>
-        <p:spPr>
-          <a:xfrm>
-            <a:off x="4572000" y="3950208"/>
-            <a:ext cx="292608" cy="292608"/>
-          </a:xfrm>
-          <a:prstGeom prst="rect">
-            <a:avLst/>
-          </a:prstGeom>
-        </p:spPr>
-      </p:pic>
-      <p:sp>
-        <p:nvSpPr>
-          <p:cNvPr id="22" name="Text 12"/>
-          <p:cNvSpPr/>
-          <p:nvPr/>
-        </p:nvSpPr>
-        <p:spPr>
-          <a:xfrm>
-            <a:off x="4956048" y="3858768"/>
-            <a:ext cx="3657600" cy="594360"/>
-          </a:xfrm>
-          <a:prstGeom prst="rect">
-            <a:avLst/>
-          </a:prstGeom>
-          <a:noFill/>
-          <a:ln/>
-        </p:spPr>
-        <p:txBody>
-          <a:bodyPr wrap="square" rtlCol="0" anchor="ctr"/>
-          <a:lstStyle/>
-          <a:p>
-            <a:pPr marL="0" indent="0">
-              <a:buNone/>
-            </a:pPr>
+              <a:t>Stocker TAILLE dans save.txt, recréer la grille avant </a:t>
+            </a:r>
+            <a:r>
+              <a:rPr lang="en-US" sz="1100" dirty="0" err="1">
+                <a:solidFill>
+                  <a:srgbClr val="475569"/>
+                </a:solidFill>
+                <a:latin typeface="Calibri" pitchFamily="34" charset="0"/>
+                <a:ea typeface="Calibri" pitchFamily="34" charset="-122"/>
+                <a:cs typeface="Calibri" pitchFamily="34" charset="-120"/>
+              </a:rPr>
+              <a:t>chargement</a:t>
+            </a:r>
             <a:r>
               <a:rPr lang="en-US" sz="1100" dirty="0">
                 <a:solidFill>
@@ -6070,7 +6391,73 @@
                 <a:ea typeface="Calibri" pitchFamily="34" charset="-122"/>
                 <a:cs typeface="Calibri" pitchFamily="34" charset="-120"/>
               </a:rPr>
-              <a:t>Découpage en 5 fichiers .c + prototypes dans main.c</a:t>
+              <a:t> pour </a:t>
+            </a:r>
+            <a:r>
+              <a:rPr lang="en-US" sz="1100" dirty="0" err="1">
+                <a:solidFill>
+                  <a:srgbClr val="475569"/>
+                </a:solidFill>
+                <a:latin typeface="Calibri" pitchFamily="34" charset="0"/>
+                <a:ea typeface="Calibri" pitchFamily="34" charset="-122"/>
+                <a:cs typeface="Calibri" pitchFamily="34" charset="-120"/>
+              </a:rPr>
+              <a:t>éviter</a:t>
+            </a:r>
+            <a:r>
+              <a:rPr lang="en-US" sz="1100" dirty="0">
+                <a:solidFill>
+                  <a:srgbClr val="475569"/>
+                </a:solidFill>
+                <a:latin typeface="Calibri" pitchFamily="34" charset="0"/>
+                <a:ea typeface="Calibri" pitchFamily="34" charset="-122"/>
+                <a:cs typeface="Calibri" pitchFamily="34" charset="-120"/>
+              </a:rPr>
+              <a:t> </a:t>
+            </a:r>
+            <a:r>
+              <a:rPr lang="en-US" sz="1100" dirty="0" err="1">
+                <a:solidFill>
+                  <a:srgbClr val="475569"/>
+                </a:solidFill>
+                <a:latin typeface="Calibri" pitchFamily="34" charset="0"/>
+                <a:ea typeface="Calibri" pitchFamily="34" charset="-122"/>
+                <a:cs typeface="Calibri" pitchFamily="34" charset="-120"/>
+              </a:rPr>
+              <a:t>une</a:t>
+            </a:r>
+            <a:r>
+              <a:rPr lang="en-US" sz="1100" dirty="0">
+                <a:solidFill>
+                  <a:srgbClr val="475569"/>
+                </a:solidFill>
+                <a:latin typeface="Calibri" pitchFamily="34" charset="0"/>
+                <a:ea typeface="Calibri" pitchFamily="34" charset="-122"/>
+                <a:cs typeface="Calibri" pitchFamily="34" charset="-120"/>
+              </a:rPr>
+              <a:t> </a:t>
+            </a:r>
+            <a:r>
+              <a:rPr lang="en-US" sz="1100" dirty="0" err="1">
+                <a:solidFill>
+                  <a:srgbClr val="475569"/>
+                </a:solidFill>
+                <a:latin typeface="Calibri" pitchFamily="34" charset="0"/>
+                <a:ea typeface="Calibri" pitchFamily="34" charset="-122"/>
+                <a:cs typeface="Calibri" pitchFamily="34" charset="-120"/>
+              </a:rPr>
+              <a:t>mauvaise</a:t>
+            </a:r>
+            <a:r>
+              <a:rPr lang="en-US" sz="1100" dirty="0">
+                <a:solidFill>
+                  <a:srgbClr val="475569"/>
+                </a:solidFill>
+                <a:latin typeface="Calibri" pitchFamily="34" charset="0"/>
+                <a:ea typeface="Calibri" pitchFamily="34" charset="-122"/>
+                <a:cs typeface="Calibri" pitchFamily="34" charset="-120"/>
+              </a:rPr>
+              <a:t> taille</a:t>
             </a:r>
             <a:endParaRPr lang="en-US" sz="1100" dirty="0"/>
           </a:p>
@@ -6129,7 +6516,7 @@
         </p:nvSpPr>
         <p:spPr>
           <a:xfrm>
-            <a:off x="457199" y="228600"/>
+            <a:off x="1648046" y="223284"/>
             <a:ext cx="5847907" cy="594360"/>
           </a:xfrm>
           <a:prstGeom prst="rect">
@@ -6142,11 +6529,11 @@
           <a:bodyPr wrap="square" rtlCol="0" anchor="ctr"/>
           <a:lstStyle/>
           <a:p>
-            <a:pPr marL="0" indent="0">
+            <a:pPr marL="0" indent="0" algn="ctr">
               <a:buNone/>
             </a:pPr>
             <a:r>
-              <a:rPr lang="en-US" sz="2800" b="1">
+              <a:rPr lang="en-US" sz="2800" b="1" dirty="0">
                 <a:solidFill>
                   <a:srgbClr val="FFFFFF"/>
                 </a:solidFill>
@@ -6154,7 +6541,40 @@
                 <a:ea typeface="Cambria" pitchFamily="34" charset="-122"/>
                 <a:cs typeface="Cambria" pitchFamily="34" charset="-120"/>
               </a:rPr>
-              <a:t>Ma partie de code préférée</a:t>
+              <a:t>Ma </a:t>
+            </a:r>
+            <a:r>
+              <a:rPr lang="en-US" sz="2800" b="1" dirty="0" err="1">
+                <a:solidFill>
+                  <a:srgbClr val="FFFFFF"/>
+                </a:solidFill>
+                <a:latin typeface="Cambria" pitchFamily="34" charset="0"/>
+                <a:ea typeface="Cambria" pitchFamily="34" charset="-122"/>
+                <a:cs typeface="Cambria" pitchFamily="34" charset="-120"/>
+              </a:rPr>
+              <a:t>partie</a:t>
+            </a:r>
+            <a:r>
+              <a:rPr lang="en-US" sz="2800" b="1" dirty="0">
+                <a:solidFill>
+                  <a:srgbClr val="FFFFFF"/>
+                </a:solidFill>
+                <a:latin typeface="Cambria" pitchFamily="34" charset="0"/>
+                <a:ea typeface="Cambria" pitchFamily="34" charset="-122"/>
+                <a:cs typeface="Cambria" pitchFamily="34" charset="-120"/>
+              </a:rPr>
+              <a:t> de code </a:t>
+            </a:r>
+            <a:r>
+              <a:rPr lang="en-US" sz="2800" b="1" dirty="0" err="1">
+                <a:solidFill>
+                  <a:srgbClr val="FFFFFF"/>
+                </a:solidFill>
+                <a:latin typeface="Cambria" pitchFamily="34" charset="0"/>
+                <a:ea typeface="Cambria" pitchFamily="34" charset="-122"/>
+                <a:cs typeface="Cambria" pitchFamily="34" charset="-120"/>
+              </a:rPr>
+              <a:t>préférée</a:t>
             </a:r>
             <a:endParaRPr lang="en-US" sz="2800" dirty="0"/>
           </a:p>
@@ -6162,10 +6582,10 @@
       </p:sp>
       <p:pic>
         <p:nvPicPr>
-          <p:cNvPr id="7" name="Image 6">
+          <p:cNvPr id="4" name="Image 3">
             <a:extLst>
               <a:ext uri="{FF2B5EF4-FFF2-40B4-BE49-F238E27FC236}">
-                <a16:creationId xmlns:a16="http://schemas.microsoft.com/office/drawing/2014/main" id="{049BAAAE-B0A2-CA87-45C4-CF16C6597E12}"/>
+                <a16:creationId xmlns:a16="http://schemas.microsoft.com/office/drawing/2014/main" id="{CD3259E5-23DC-DE6F-22FA-7CF11611CD9C}"/>
               </a:ext>
             </a:extLst>
           </p:cNvPr>
@@ -6182,17 +6602,28 @@
         </p:blipFill>
         <p:spPr>
           <a:xfrm>
-            <a:off x="790967" y="988846"/>
-            <a:ext cx="4244708" cy="3665538"/>
-          </a:xfrm>
-          <a:prstGeom prst="rect">
-            <a:avLst/>
-          </a:prstGeom>
-          <a:ln>
+            <a:off x="1503201" y="929302"/>
+            <a:ext cx="6137598" cy="3990914"/>
+          </a:xfrm>
+          <a:prstGeom prst="rect">
+            <a:avLst/>
+          </a:prstGeom>
+          <a:ln w="38100" cap="sq">
             <a:solidFill>
-              <a:schemeClr val="accent1"/>
+              <a:schemeClr val="accent1">
+                <a:lumMod val="75000"/>
+              </a:schemeClr>
             </a:solidFill>
+            <a:prstDash val="solid"/>
+            <a:miter lim="800000"/>
           </a:ln>
+          <a:effectLst>
+            <a:outerShdw blurRad="50800" dist="38100" dir="2700000" algn="tl" rotWithShape="0">
+              <a:srgbClr val="000000">
+                <a:alpha val="43000"/>
+              </a:srgbClr>
+            </a:outerShdw>
+          </a:effectLst>
         </p:spPr>
       </p:pic>
     </p:spTree>
@@ -6281,7 +6712,7 @@
           <a:bodyPr wrap="square" rtlCol="0" anchor="ctr"/>
           <a:lstStyle/>
           <a:p>
-            <a:pPr marL="0" indent="0">
+            <a:pPr marL="0" indent="0" algn="ctr">
               <a:buNone/>
             </a:pPr>
             <a:r>

--- a/2048_presentation.pptx
+++ b/2048_presentation.pptx
@@ -314,7 +314,7 @@
                 <a:ea typeface="+mn-ea"/>
                 <a:cs typeface="+mn-cs"/>
               </a:rPr>
-              <a:t>Bonjour, je vais vous présenter mon projet fil rouge : </a:t>
+              <a:t>Bonjour à tous, je vais vous présenter mon projet fil rouge : </a:t>
             </a:r>
             <a:br>
               <a:rPr lang="fr-FR" sz="1200" kern="1200" dirty="0">
@@ -337,7 +337,7 @@
                 <a:ea typeface="+mn-ea"/>
                 <a:cs typeface="+mn-cs"/>
               </a:rPr>
-              <a:t>une implémentation du jeu 2048 en langage C, développée dans le cadre du module langages compilés.</a:t>
+              <a:t>une implémentation du jeu 2048 en langage C en console, développée dans le cadre du module langages compilés.</a:t>
             </a:r>
           </a:p>
           <a:p>
@@ -813,7 +813,41 @@
                 <a:ea typeface="+mn-ea"/>
                 <a:cs typeface="+mn-cs"/>
               </a:rPr>
-              <a:t>Et enfin un score qui s’affiche et se calcule automatiquement</a:t>
+              <a:t>Et enfin un score qui s’affiche et se calcule automatiquement.</a:t>
+            </a:r>
+            <a:br>
+              <a:rPr lang="fr-FR" sz="1200" kern="1200" dirty="0">
+                <a:solidFill>
+                  <a:schemeClr val="tx1"/>
+                </a:solidFill>
+                <a:effectLst/>
+                <a:latin typeface="+mn-lt"/>
+                <a:ea typeface="+mn-ea"/>
+                <a:cs typeface="+mn-cs"/>
+              </a:rPr>
+            </a:br>
+            <a:br>
+              <a:rPr lang="fr-FR" sz="1200" kern="1200" dirty="0">
+                <a:solidFill>
+                  <a:schemeClr val="tx1"/>
+                </a:solidFill>
+                <a:effectLst/>
+                <a:latin typeface="+mn-lt"/>
+                <a:ea typeface="+mn-ea"/>
+                <a:cs typeface="+mn-cs"/>
+              </a:rPr>
+            </a:br>
+            <a:r>
+              <a:rPr lang="fr-FR" sz="1200" kern="1200" dirty="0">
+                <a:solidFill>
+                  <a:schemeClr val="tx1"/>
+                </a:solidFill>
+                <a:effectLst/>
+                <a:latin typeface="+mn-lt"/>
+                <a:ea typeface="+mn-ea"/>
+                <a:cs typeface="+mn-cs"/>
+              </a:rPr>
+              <a:t>FAIRE LA DEMO DU JEU</a:t>
             </a:r>
             <a:endParaRPr lang="en-US" dirty="0"/>
           </a:p>
@@ -900,62 +934,35 @@
           <a:lstStyle/>
           <a:p>
             <a:r>
-              <a:rPr lang="fr-FR" sz="1200" kern="1200" dirty="0">
-                <a:solidFill>
-                  <a:schemeClr val="tx1"/>
-                </a:solidFill>
-                <a:effectLst/>
-                <a:latin typeface="+mn-lt"/>
-                <a:ea typeface="+mn-ea"/>
-                <a:cs typeface="+mn-cs"/>
-              </a:rPr>
-              <a:t>La principale difficulté était l'algorithme de déplacement. </a:t>
+              <a:rPr lang="fr-FR" dirty="0"/>
+              <a:t>J'ai rencontré trois difficultés principales. </a:t>
             </a:r>
             <a:br>
-              <a:rPr lang="fr-FR" sz="1200" kern="1200" dirty="0">
-                <a:solidFill>
-                  <a:schemeClr val="tx1"/>
-                </a:solidFill>
-                <a:effectLst/>
-                <a:latin typeface="+mn-lt"/>
-                <a:ea typeface="+mn-ea"/>
-                <a:cs typeface="+mn-cs"/>
-              </a:rPr>
+              <a:rPr lang="fr-FR" dirty="0"/>
             </a:br>
             <a:r>
-              <a:rPr lang="fr-FR" sz="1200" kern="1200" dirty="0">
-                <a:solidFill>
-                  <a:schemeClr val="tx1"/>
-                </a:solidFill>
-                <a:effectLst/>
-                <a:latin typeface="+mn-lt"/>
-                <a:ea typeface="+mn-ea"/>
-                <a:cs typeface="+mn-cs"/>
-              </a:rPr>
-              <a:t>Au départ les tuiles sautaient par-dessus d'autres. J'ai résolu ça en découpant chaque mouvement en 3 étapes : tasser, fusionner, puis retasser. </a:t>
+              <a:rPr lang="fr-FR" dirty="0"/>
+              <a:t>La première c'est le bug de saut des tuiles — au départ une tuile pouvait fusionner deux fois de suite. Je l'ai résolu en découpant chaque déplacement en 3 étapes : tasser, fusionner, puis retasser. </a:t>
             </a:r>
             <a:br>
-              <a:rPr lang="fr-FR" sz="1200" kern="1200" dirty="0">
-                <a:solidFill>
-                  <a:schemeClr val="tx1"/>
-                </a:solidFill>
-                <a:effectLst/>
-                <a:latin typeface="+mn-lt"/>
-                <a:ea typeface="+mn-ea"/>
-                <a:cs typeface="+mn-cs"/>
-              </a:rPr>
+              <a:rPr lang="fr-FR" dirty="0"/>
             </a:br>
-            <a:r>
-              <a:rPr lang="fr-FR" sz="1200" kern="1200" dirty="0">
-                <a:solidFill>
-                  <a:schemeClr val="tx1"/>
-                </a:solidFill>
-                <a:effectLst/>
-                <a:latin typeface="+mn-lt"/>
-                <a:ea typeface="+mn-ea"/>
-                <a:cs typeface="+mn-cs"/>
-              </a:rPr>
-              <a:t>La sauvegarde multi-taille a aussi été délicate car il fallait recréer la grille à la bonne taille avant de charger les données</a:t>
+            <a:br>
+              <a:rPr lang="fr-FR" dirty="0"/>
+            </a:br>
+            <a:r>
+              <a:rPr lang="fr-FR" dirty="0"/>
+              <a:t>Ensuite les déplacements haut et bas étaient plus compliqués car il fallait travailler colonne par colonne au lieu de ligne par ligne, donc j'ai transposé la même logique. </a:t>
+            </a:r>
+            <a:br>
+              <a:rPr lang="fr-FR" dirty="0"/>
+            </a:br>
+            <a:br>
+              <a:rPr lang="fr-FR" dirty="0"/>
+            </a:br>
+            <a:r>
+              <a:rPr lang="fr-FR" dirty="0"/>
+              <a:t>Et enfin pour la sauvegarde, le problème c'est que si on sauvegarde une grille 5x5 et qu'on recharge en 4x4, ça plante. J'ai donc stocké la taille dans le fichier save.txt et je recrée la grille à la bonne dimension avant de charger les données</a:t>
             </a:r>
             <a:endParaRPr lang="en-US" dirty="0"/>
           </a:p>
@@ -1060,86 +1067,44 @@
           <a:lstStyle/>
           <a:p>
             <a:r>
-              <a:rPr lang="fr-FR" sz="1200" kern="1200" dirty="0">
-                <a:solidFill>
-                  <a:schemeClr val="tx1"/>
-                </a:solidFill>
-                <a:effectLst/>
-                <a:latin typeface="+mn-lt"/>
-                <a:ea typeface="+mn-ea"/>
-                <a:cs typeface="+mn-cs"/>
-              </a:rPr>
-              <a:t>Ma partie de code préférée c'est </a:t>
-            </a:r>
-            <a:r>
-              <a:rPr lang="fr-FR" sz="1200" kern="1200" dirty="0" err="1">
-                <a:solidFill>
-                  <a:schemeClr val="tx1"/>
-                </a:solidFill>
-                <a:effectLst/>
-                <a:latin typeface="+mn-lt"/>
-                <a:ea typeface="+mn-ea"/>
-                <a:cs typeface="+mn-cs"/>
-              </a:rPr>
+              <a:rPr lang="fr-FR" dirty="0"/>
+              <a:t>Ma partie de code préférée c'est la fonction </a:t>
+            </a:r>
+            <a:r>
+              <a:rPr lang="fr-FR" dirty="0" err="1"/>
               <a:t>ajouter_tuile</a:t>
             </a:r>
             <a:r>
-              <a:rPr lang="fr-FR" sz="1200" kern="1200" dirty="0">
-                <a:solidFill>
-                  <a:schemeClr val="tx1"/>
-                </a:solidFill>
-                <a:effectLst/>
-                <a:latin typeface="+mn-lt"/>
-                <a:ea typeface="+mn-ea"/>
-                <a:cs typeface="+mn-cs"/>
-              </a:rPr>
+              <a:rPr lang="fr-FR" dirty="0"/>
               <a:t>. </a:t>
             </a:r>
             <a:br>
-              <a:rPr lang="fr-FR" sz="1200" kern="1200" dirty="0">
-                <a:solidFill>
-                  <a:schemeClr val="tx1"/>
-                </a:solidFill>
-                <a:effectLst/>
-                <a:latin typeface="+mn-lt"/>
-                <a:ea typeface="+mn-ea"/>
-                <a:cs typeface="+mn-cs"/>
-              </a:rPr>
+              <a:rPr lang="fr-FR" dirty="0"/>
             </a:br>
             <a:r>
-              <a:rPr lang="fr-FR" sz="1200" kern="1200" dirty="0">
-                <a:solidFill>
-                  <a:schemeClr val="tx1"/>
-                </a:solidFill>
-                <a:effectLst/>
-                <a:latin typeface="+mn-lt"/>
-                <a:ea typeface="+mn-ea"/>
-                <a:cs typeface="+mn-cs"/>
-              </a:rPr>
-              <a:t>Ce que j'aime c'est l'approche algorithmique : plutôt que de chercher une case vide au hasard en boucle, je recense d'abord toutes les cases vides, puis je tire une seule fois au sort parmi elles. </a:t>
+              <a:rPr lang="fr-FR" dirty="0"/>
+              <a:t>Ce que j'aime c'est l'approche algorithmique : plutôt que de chercher une case vide au hasard en boucle, je recense d'abord toutes les cases vides dans un tableau appelé libres, et j'initialise une variable n qui va compter </a:t>
             </a:r>
             <a:br>
-              <a:rPr lang="fr-FR" sz="1200" kern="1200" dirty="0">
-                <a:solidFill>
-                  <a:schemeClr val="tx1"/>
-                </a:solidFill>
-                <a:effectLst/>
-                <a:latin typeface="+mn-lt"/>
-                <a:ea typeface="+mn-ea"/>
-                <a:cs typeface="+mn-cs"/>
-              </a:rPr>
+              <a:rPr lang="fr-FR" dirty="0"/>
             </a:br>
             <a:r>
-              <a:rPr lang="fr-FR" sz="1200" kern="1200" dirty="0">
-                <a:solidFill>
-                  <a:schemeClr val="tx1"/>
-                </a:solidFill>
-                <a:effectLst/>
-                <a:latin typeface="+mn-lt"/>
-                <a:ea typeface="+mn-ea"/>
-                <a:cs typeface="+mn-cs"/>
-              </a:rPr>
-              <a:t>C'est plus propre et ça évite de boucler longtemps si la grille est presque pleine</a:t>
+              <a:rPr lang="fr-FR" dirty="0"/>
+              <a:t>le nombre de cases vides trouvées au fur et à mesure. </a:t>
+            </a:r>
+            <a:br>
+              <a:rPr lang="fr-FR" dirty="0"/>
+            </a:br>
+            <a:r>
+              <a:rPr lang="fr-FR" dirty="0"/>
+              <a:t>Ensuite je parcours toute la grille, et à chaque fois que je tombe sur une case à zéro, je stocke ses coordonnées et j'incrémente n. </a:t>
+            </a:r>
+            <a:br>
+              <a:rPr lang="fr-FR" dirty="0"/>
+            </a:br>
+            <a:r>
+              <a:rPr lang="fr-FR" dirty="0"/>
+              <a:t>Une fois le parcours terminé, je tire un seul nombre aléatoire entre 0 et n-1, ce qui me donne directement une case vide au hasard. C'est plus propre et ça évite de boucler indéfiniment si la grille est presque pleine.</a:t>
             </a:r>
             <a:endParaRPr lang="en-US" dirty="0"/>
           </a:p>
@@ -5659,7 +5624,7 @@
         </p:nvSpPr>
         <p:spPr>
           <a:xfrm>
-            <a:off x="960120" y="3155097"/>
+            <a:off x="918972" y="3113097"/>
             <a:ext cx="4572000" cy="276999"/>
           </a:xfrm>
           <a:prstGeom prst="rect">
@@ -6035,7 +6000,9 @@
             <a:r>
               <a:rPr lang="en-US" sz="1100" dirty="0">
                 <a:solidFill>
-                  <a:srgbClr val="475569"/>
+                  <a:schemeClr val="bg1">
+                    <a:lumMod val="85000"/>
+                  </a:schemeClr>
                 </a:solidFill>
                 <a:latin typeface="Calibri" pitchFamily="34" charset="0"/>
                 <a:ea typeface="Calibri" pitchFamily="34" charset="-122"/>
@@ -6043,7 +6010,13 @@
               </a:rPr>
               <a:t>Algorithme en 3 étapes : tasser → fusionner → retasser</a:t>
             </a:r>
-            <a:endParaRPr lang="en-US" sz="1100" dirty="0"/>
+            <a:endParaRPr lang="en-US" sz="1100" dirty="0">
+              <a:solidFill>
+                <a:schemeClr val="bg1">
+                  <a:lumMod val="85000"/>
+                </a:schemeClr>
+              </a:solidFill>
+            </a:endParaRPr>
           </a:p>
         </p:txBody>
       </p:sp>
@@ -6199,7 +6172,9 @@
             <a:r>
               <a:rPr lang="en-US" sz="1100" dirty="0">
                 <a:solidFill>
-                  <a:srgbClr val="475569"/>
+                  <a:schemeClr val="bg1">
+                    <a:lumMod val="85000"/>
+                  </a:schemeClr>
                 </a:solidFill>
                 <a:latin typeface="Calibri" pitchFamily="34" charset="0"/>
                 <a:ea typeface="Calibri" pitchFamily="34" charset="-122"/>
@@ -6207,7 +6182,13 @@
               </a:rPr>
               <a:t>Transposer la logique ligne → colonne</a:t>
             </a:r>
-            <a:endParaRPr lang="en-US" sz="1100" dirty="0"/>
+            <a:endParaRPr lang="en-US" sz="1100" dirty="0">
+              <a:solidFill>
+                <a:schemeClr val="bg1">
+                  <a:lumMod val="85000"/>
+                </a:schemeClr>
+              </a:solidFill>
+            </a:endParaRPr>
           </a:p>
         </p:txBody>
       </p:sp>
@@ -6363,18 +6344,22 @@
             <a:r>
               <a:rPr lang="en-US" sz="1100" dirty="0">
                 <a:solidFill>
-                  <a:srgbClr val="475569"/>
-                </a:solidFill>
-                <a:latin typeface="Calibri" pitchFamily="34" charset="0"/>
-                <a:ea typeface="Calibri" pitchFamily="34" charset="-122"/>
-                <a:cs typeface="Calibri" pitchFamily="34" charset="-120"/>
-              </a:rPr>
-              <a:t>Stocker TAILLE dans save.txt, recréer la grille avant </a:t>
+                  <a:schemeClr val="bg1">
+                    <a:lumMod val="85000"/>
+                  </a:schemeClr>
+                </a:solidFill>
+                <a:latin typeface="Calibri" pitchFamily="34" charset="0"/>
+                <a:ea typeface="Calibri" pitchFamily="34" charset="-122"/>
+                <a:cs typeface="Calibri" pitchFamily="34" charset="-120"/>
+              </a:rPr>
+              <a:t>Stocker la TAILLE dans save.txt, recréer la grille avant le </a:t>
             </a:r>
             <a:r>
               <a:rPr lang="en-US" sz="1100" dirty="0" err="1">
                 <a:solidFill>
-                  <a:srgbClr val="475569"/>
+                  <a:schemeClr val="bg1">
+                    <a:lumMod val="85000"/>
+                  </a:schemeClr>
                 </a:solidFill>
                 <a:latin typeface="Calibri" pitchFamily="34" charset="0"/>
                 <a:ea typeface="Calibri" pitchFamily="34" charset="-122"/>
@@ -6385,7 +6370,9 @@
             <a:r>
               <a:rPr lang="en-US" sz="1100" dirty="0">
                 <a:solidFill>
-                  <a:srgbClr val="475569"/>
+                  <a:schemeClr val="bg1">
+                    <a:lumMod val="85000"/>
+                  </a:schemeClr>
                 </a:solidFill>
                 <a:latin typeface="Calibri" pitchFamily="34" charset="0"/>
                 <a:ea typeface="Calibri" pitchFamily="34" charset="-122"/>
@@ -6396,7 +6383,9 @@
             <a:r>
               <a:rPr lang="en-US" sz="1100" dirty="0" err="1">
                 <a:solidFill>
-                  <a:srgbClr val="475569"/>
+                  <a:schemeClr val="bg1">
+                    <a:lumMod val="85000"/>
+                  </a:schemeClr>
                 </a:solidFill>
                 <a:latin typeface="Calibri" pitchFamily="34" charset="0"/>
                 <a:ea typeface="Calibri" pitchFamily="34" charset="-122"/>
@@ -6407,7 +6396,9 @@
             <a:r>
               <a:rPr lang="en-US" sz="1100" dirty="0">
                 <a:solidFill>
-                  <a:srgbClr val="475569"/>
+                  <a:schemeClr val="bg1">
+                    <a:lumMod val="85000"/>
+                  </a:schemeClr>
                 </a:solidFill>
                 <a:latin typeface="Calibri" pitchFamily="34" charset="0"/>
                 <a:ea typeface="Calibri" pitchFamily="34" charset="-122"/>
@@ -6418,7 +6409,9 @@
             <a:r>
               <a:rPr lang="en-US" sz="1100" dirty="0" err="1">
                 <a:solidFill>
-                  <a:srgbClr val="475569"/>
+                  <a:schemeClr val="bg1">
+                    <a:lumMod val="85000"/>
+                  </a:schemeClr>
                 </a:solidFill>
                 <a:latin typeface="Calibri" pitchFamily="34" charset="0"/>
                 <a:ea typeface="Calibri" pitchFamily="34" charset="-122"/>
@@ -6429,7 +6422,9 @@
             <a:r>
               <a:rPr lang="en-US" sz="1100" dirty="0">
                 <a:solidFill>
-                  <a:srgbClr val="475569"/>
+                  <a:schemeClr val="bg1">
+                    <a:lumMod val="85000"/>
+                  </a:schemeClr>
                 </a:solidFill>
                 <a:latin typeface="Calibri" pitchFamily="34" charset="0"/>
                 <a:ea typeface="Calibri" pitchFamily="34" charset="-122"/>
@@ -6440,7 +6435,9 @@
             <a:r>
               <a:rPr lang="en-US" sz="1100" dirty="0" err="1">
                 <a:solidFill>
-                  <a:srgbClr val="475569"/>
+                  <a:schemeClr val="bg1">
+                    <a:lumMod val="85000"/>
+                  </a:schemeClr>
                 </a:solidFill>
                 <a:latin typeface="Calibri" pitchFamily="34" charset="0"/>
                 <a:ea typeface="Calibri" pitchFamily="34" charset="-122"/>
@@ -6451,7 +6448,9 @@
             <a:r>
               <a:rPr lang="en-US" sz="1100" dirty="0">
                 <a:solidFill>
-                  <a:srgbClr val="475569"/>
+                  <a:schemeClr val="bg1">
+                    <a:lumMod val="85000"/>
+                  </a:schemeClr>
                 </a:solidFill>
                 <a:latin typeface="Calibri" pitchFamily="34" charset="0"/>
                 <a:ea typeface="Calibri" pitchFamily="34" charset="-122"/>
@@ -6459,7 +6458,13 @@
               </a:rPr>
               <a:t> taille</a:t>
             </a:r>
-            <a:endParaRPr lang="en-US" sz="1100" dirty="0"/>
+            <a:endParaRPr lang="en-US" sz="1100" dirty="0">
+              <a:solidFill>
+                <a:schemeClr val="bg1">
+                  <a:lumMod val="85000"/>
+                </a:schemeClr>
+              </a:solidFill>
+            </a:endParaRPr>
           </a:p>
         </p:txBody>
       </p:sp>
